--- a/AI-Test-Automation-Reporting-Demo.pptx
+++ b/AI-Test-Automation-Reporting-Demo.pptx
@@ -23,6 +23,7 @@
     <p:sldId id="271" r:id="rId22"/>
     <p:sldId id="272" r:id="rId23"/>
     <p:sldId id="273" r:id="rId24"/>
+    <p:sldId id="274" r:id="rId25"/>
   </p:sldIdLst>
   <p:sldSz cx="12191695" cy="6858000" type="screen4x3"/>
   <p:notesSz cx="6858000" cy="9144000"/>
@@ -7289,7 +7290,7 @@
                 </a:solidFill>
                 <a:latin typeface="Calibri"/>
               </a:rPr>
-              <a:t>Future Flow</a:t>
+              <a:t>Future Goal — Jira Test Management</a:t>
             </a:r>
           </a:p>
         </p:txBody>
@@ -7324,7 +7325,7 @@
                 </a:solidFill>
                 <a:latin typeface="Calibri"/>
               </a:rPr>
-              <a:t>What happens automatically after a failure</a:t>
+              <a:t>Close the loop between automation runs and the test-management tool</a:t>
             </a:r>
           </a:p>
         </p:txBody>
@@ -7337,14 +7338,14 @@
         </p:nvSpPr>
         <p:spPr>
           <a:xfrm>
-            <a:off x="457200" y="1828800"/>
-            <a:ext cx="1737360" cy="1005840"/>
-          </a:xfrm>
-          <a:prstGeom prst="rect">
-            <a:avLst/>
-          </a:prstGeom>
-          <a:solidFill>
-            <a:srgbClr val="C92A2A"/>
+            <a:off x="457200" y="1371600"/>
+            <a:ext cx="5623560" cy="4937760"/>
+          </a:xfrm>
+          <a:prstGeom prst="rect">
+            <a:avLst/>
+          </a:prstGeom>
+          <a:solidFill>
+            <a:srgbClr val="F2F5F9"/>
           </a:solidFill>
           <a:ln>
             <a:noFill/>
@@ -7374,55 +7375,20 @@
       </p:sp>
       <p:sp>
         <p:nvSpPr>
-          <p:cNvPr id="8" name="TextBox 7"/>
-          <p:cNvSpPr txBox="1"/>
-          <p:nvPr/>
-        </p:nvSpPr>
-        <p:spPr>
-          <a:xfrm>
-            <a:off x="457200" y="2011680"/>
-            <a:ext cx="1737360" cy="640080"/>
-          </a:xfrm>
-          <a:prstGeom prst="rect">
-            <a:avLst/>
-          </a:prstGeom>
-          <a:noFill/>
-        </p:spPr>
-        <p:txBody>
-          <a:bodyPr wrap="square" lIns="45720" rIns="45720" tIns="18288" bIns="18288">
-            <a:spAutoFit/>
-          </a:bodyPr>
-          <a:lstStyle/>
-          <a:p>
-            <a:pPr algn="ctr"/>
-            <a:r>
-              <a:rPr sz="1700" b="1">
-                <a:solidFill>
-                  <a:srgbClr val="FFFFFF"/>
-                </a:solidFill>
-                <a:latin typeface="Calibri"/>
-              </a:rPr>
-              <a:t>Build Fails</a:t>
-            </a:r>
-          </a:p>
-        </p:txBody>
-      </p:sp>
-      <p:sp>
-        <p:nvSpPr>
-          <p:cNvPr id="9" name="Right Arrow 8"/>
+          <p:cNvPr id="8" name="Rectangle 7"/>
           <p:cNvSpPr/>
           <p:nvPr/>
         </p:nvSpPr>
         <p:spPr>
           <a:xfrm>
-            <a:off x="2240280" y="2148840"/>
-            <a:ext cx="365760" cy="365760"/>
-          </a:xfrm>
-          <a:prstGeom prst="rightArrow">
-            <a:avLst/>
-          </a:prstGeom>
-          <a:solidFill>
-            <a:srgbClr val="F5A623"/>
+            <a:off x="457200" y="1371600"/>
+            <a:ext cx="5623560" cy="502920"/>
+          </a:xfrm>
+          <a:prstGeom prst="rect">
+            <a:avLst/>
+          </a:prstGeom>
+          <a:solidFill>
+            <a:srgbClr val="0F8B8D"/>
           </a:solidFill>
           <a:ln>
             <a:noFill/>
@@ -7452,20 +7418,225 @@
       </p:sp>
       <p:sp>
         <p:nvSpPr>
-          <p:cNvPr id="10" name="Rectangle 9"/>
+          <p:cNvPr id="9" name="TextBox 8"/>
+          <p:cNvSpPr txBox="1"/>
+          <p:nvPr/>
+        </p:nvSpPr>
+        <p:spPr>
+          <a:xfrm>
+            <a:off x="640080" y="1444752"/>
+            <a:ext cx="5486400" cy="411480"/>
+          </a:xfrm>
+          <a:prstGeom prst="rect">
+            <a:avLst/>
+          </a:prstGeom>
+          <a:noFill/>
+        </p:spPr>
+        <p:txBody>
+          <a:bodyPr wrap="square" lIns="45720" rIns="45720" tIns="18288" bIns="18288">
+            <a:spAutoFit/>
+          </a:bodyPr>
+          <a:lstStyle/>
+          <a:p>
+            <a:pPr algn="l"/>
+            <a:r>
+              <a:rPr sz="1700" b="1">
+                <a:solidFill>
+                  <a:srgbClr val="FFFFFF"/>
+                </a:solidFill>
+                <a:latin typeface="Calibri"/>
+              </a:rPr>
+              <a:t>🧪  Sync with Jira Test Management (Xray / Zephyr)</a:t>
+            </a:r>
+          </a:p>
+        </p:txBody>
+      </p:sp>
+      <p:sp>
+        <p:nvSpPr>
+          <p:cNvPr id="10" name="TextBox 9"/>
+          <p:cNvSpPr txBox="1"/>
+          <p:nvPr/>
+        </p:nvSpPr>
+        <p:spPr>
+          <a:xfrm>
+            <a:off x="640080" y="2011680"/>
+            <a:ext cx="5303520" cy="4114800"/>
+          </a:xfrm>
+          <a:prstGeom prst="rect">
+            <a:avLst/>
+          </a:prstGeom>
+          <a:noFill/>
+        </p:spPr>
+        <p:txBody>
+          <a:bodyPr wrap="square">
+            <a:spAutoFit/>
+          </a:bodyPr>
+          <a:lstStyle/>
+          <a:p>
+            <a:pPr algn="l">
+              <a:spcAft>
+                <a:spcPts val="400"/>
+              </a:spcAft>
+            </a:pPr>
+            <a:r>
+              <a:rPr sz="1400">
+                <a:solidFill>
+                  <a:srgbClr val="0B2A4A"/>
+                </a:solidFill>
+                <a:latin typeface="Calibri"/>
+              </a:rPr>
+              <a:t>•  Every automated test case in Jenkins maps to a Jira Test in Xray / Zephyr</a:t>
+            </a:r>
+          </a:p>
+          <a:p>
+            <a:pPr algn="l">
+              <a:spcAft>
+                <a:spcPts val="400"/>
+              </a:spcAft>
+            </a:pPr>
+            <a:r>
+              <a:rPr sz="1400">
+                <a:solidFill>
+                  <a:srgbClr val="0B2A4A"/>
+                </a:solidFill>
+                <a:latin typeface="Calibri"/>
+              </a:rPr>
+              <a:t>•  After each build, Copilot pushes execution results into a Jira Test Cycle</a:t>
+            </a:r>
+          </a:p>
+          <a:p>
+            <a:pPr algn="l">
+              <a:spcAft>
+                <a:spcPts val="400"/>
+              </a:spcAft>
+            </a:pPr>
+            <a:r>
+              <a:rPr sz="1400">
+                <a:solidFill>
+                  <a:srgbClr val="0B2A4A"/>
+                </a:solidFill>
+                <a:latin typeface="Calibri"/>
+              </a:rPr>
+              <a:t>•  Failing tests are auto-linked to the Jira bug created from the failure</a:t>
+            </a:r>
+          </a:p>
+          <a:p>
+            <a:pPr algn="l">
+              <a:spcAft>
+                <a:spcPts val="400"/>
+              </a:spcAft>
+            </a:pPr>
+            <a:r>
+              <a:rPr sz="1400">
+                <a:solidFill>
+                  <a:srgbClr val="0B2A4A"/>
+                </a:solidFill>
+                <a:latin typeface="Calibri"/>
+              </a:rPr>
+              <a:t>•  Traceability: Requirement → Test → Execution → Defect, end-to-end</a:t>
+            </a:r>
+          </a:p>
+          <a:p>
+            <a:pPr algn="l">
+              <a:spcAft>
+                <a:spcPts val="400"/>
+              </a:spcAft>
+            </a:pPr>
+            <a:r>
+              <a:rPr sz="1400">
+                <a:solidFill>
+                  <a:srgbClr val="0B2A4A"/>
+                </a:solidFill>
+                <a:latin typeface="Calibri"/>
+              </a:rPr>
+              <a:t>•  Test-manager sees pass/fail trends inside Jira, not just Jenkins</a:t>
+            </a:r>
+          </a:p>
+          <a:p>
+            <a:pPr algn="l">
+              <a:spcAft>
+                <a:spcPts val="400"/>
+              </a:spcAft>
+            </a:pPr>
+            <a:r>
+              <a:rPr sz="1400">
+                <a:solidFill>
+                  <a:srgbClr val="0B2A4A"/>
+                </a:solidFill>
+                <a:latin typeface="Calibri"/>
+              </a:rPr>
+              <a:t>•  Manual + automated coverage visible on one dashboard</a:t>
+            </a:r>
+          </a:p>
+          <a:p>
+            <a:pPr algn="l">
+              <a:spcAft>
+                <a:spcPts val="400"/>
+              </a:spcAft>
+            </a:pPr>
+            <a:r>
+              <a:rPr sz="1400">
+                <a:solidFill>
+                  <a:srgbClr val="0B2A4A"/>
+                </a:solidFill>
+                <a:latin typeface="Calibri"/>
+              </a:rPr>
+              <a:t>•  Uses the Jira / Xray MCP server — no custom REST plumbing</a:t>
+            </a:r>
+          </a:p>
+        </p:txBody>
+      </p:sp>
+      <p:sp>
+        <p:nvSpPr>
+          <p:cNvPr id="11" name="TextBox 10"/>
+          <p:cNvSpPr txBox="1"/>
+          <p:nvPr/>
+        </p:nvSpPr>
+        <p:spPr>
+          <a:xfrm>
+            <a:off x="6400800" y="1371600"/>
+            <a:ext cx="5303520" cy="457200"/>
+          </a:xfrm>
+          <a:prstGeom prst="rect">
+            <a:avLst/>
+          </a:prstGeom>
+          <a:noFill/>
+        </p:spPr>
+        <p:txBody>
+          <a:bodyPr wrap="square" lIns="45720" rIns="45720" tIns="18288" bIns="18288">
+            <a:spAutoFit/>
+          </a:bodyPr>
+          <a:lstStyle/>
+          <a:p>
+            <a:pPr algn="l"/>
+            <a:r>
+              <a:rPr sz="1800" b="1">
+                <a:solidFill>
+                  <a:srgbClr val="0B2A4A"/>
+                </a:solidFill>
+                <a:latin typeface="Calibri"/>
+              </a:rPr>
+              <a:t>How it fits together</a:t>
+            </a:r>
+          </a:p>
+        </p:txBody>
+      </p:sp>
+      <p:sp>
+        <p:nvSpPr>
+          <p:cNvPr id="12" name="Rectangle 11"/>
           <p:cNvSpPr/>
           <p:nvPr/>
         </p:nvSpPr>
         <p:spPr>
           <a:xfrm>
-            <a:off x="2697480" y="1828800"/>
-            <a:ext cx="2194560" cy="1005840"/>
-          </a:xfrm>
-          <a:prstGeom prst="rect">
-            <a:avLst/>
-          </a:prstGeom>
-          <a:solidFill>
-            <a:srgbClr val="7A3FA6"/>
+            <a:off x="6400800" y="1965960"/>
+            <a:ext cx="2194560" cy="685800"/>
+          </a:xfrm>
+          <a:prstGeom prst="rect">
+            <a:avLst/>
+          </a:prstGeom>
+          <a:solidFill>
+            <a:srgbClr val="1F6FB5"/>
           </a:solidFill>
           <a:ln>
             <a:noFill/>
@@ -7495,14 +7666,14 @@
       </p:sp>
       <p:sp>
         <p:nvSpPr>
-          <p:cNvPr id="11" name="TextBox 10"/>
+          <p:cNvPr id="13" name="TextBox 12"/>
           <p:cNvSpPr txBox="1"/>
           <p:nvPr/>
         </p:nvSpPr>
         <p:spPr>
           <a:xfrm>
-            <a:off x="2697480" y="1965960"/>
-            <a:ext cx="2194560" cy="731520"/>
+            <a:off x="6400800" y="2139696"/>
+            <a:ext cx="2194560" cy="365760"/>
           </a:xfrm>
           <a:prstGeom prst="rect">
             <a:avLst/>
@@ -7517,45 +7688,33 @@
           <a:p>
             <a:pPr algn="ctr"/>
             <a:r>
-              <a:rPr sz="1500" b="1">
+              <a:rPr sz="1300" b="1">
                 <a:solidFill>
                   <a:srgbClr val="FFFFFF"/>
                 </a:solidFill>
                 <a:latin typeface="Calibri"/>
               </a:rPr>
-              <a:t>AI Classifier</a:t>
-            </a:r>
-          </a:p>
-          <a:p>
-            <a:pPr algn="ctr"/>
-            <a:r>
-              <a:rPr sz="1500" b="1">
-                <a:solidFill>
-                  <a:srgbClr val="FFFFFF"/>
-                </a:solidFill>
-                <a:latin typeface="Calibri"/>
-              </a:rPr>
-              <a:t>(Copilot)</a:t>
-            </a:r>
-          </a:p>
-        </p:txBody>
-      </p:sp>
-      <p:sp>
-        <p:nvSpPr>
-          <p:cNvPr id="12" name="Right Arrow 11"/>
+              <a:t>Jenkins build</a:t>
+            </a:r>
+          </a:p>
+        </p:txBody>
+      </p:sp>
+      <p:sp>
+        <p:nvSpPr>
+          <p:cNvPr id="14" name="Rectangle 13"/>
           <p:cNvSpPr/>
           <p:nvPr/>
         </p:nvSpPr>
         <p:spPr>
           <a:xfrm>
-            <a:off x="4937760" y="1097280"/>
-            <a:ext cx="365760" cy="320040"/>
-          </a:xfrm>
-          <a:prstGeom prst="rightArrow">
-            <a:avLst/>
-          </a:prstGeom>
-          <a:solidFill>
-            <a:srgbClr val="F5A623"/>
+            <a:off x="8732520" y="1965960"/>
+            <a:ext cx="2971800" cy="685800"/>
+          </a:xfrm>
+          <a:prstGeom prst="rect">
+            <a:avLst/>
+          </a:prstGeom>
+          <a:solidFill>
+            <a:srgbClr val="F2F5F9"/>
           </a:solidFill>
           <a:ln>
             <a:noFill/>
@@ -7585,20 +7744,55 @@
       </p:sp>
       <p:sp>
         <p:nvSpPr>
-          <p:cNvPr id="13" name="Rectangle 12"/>
+          <p:cNvPr id="15" name="TextBox 14"/>
+          <p:cNvSpPr txBox="1"/>
+          <p:nvPr/>
+        </p:nvSpPr>
+        <p:spPr>
+          <a:xfrm>
+            <a:off x="8869680" y="2167128"/>
+            <a:ext cx="2788920" cy="365760"/>
+          </a:xfrm>
+          <a:prstGeom prst="rect">
+            <a:avLst/>
+          </a:prstGeom>
+          <a:noFill/>
+        </p:spPr>
+        <p:txBody>
+          <a:bodyPr wrap="square" lIns="45720" rIns="45720" tIns="18288" bIns="18288">
+            <a:spAutoFit/>
+          </a:bodyPr>
+          <a:lstStyle/>
+          <a:p>
+            <a:pPr algn="l"/>
+            <a:r>
+              <a:rPr sz="1200" b="0">
+                <a:solidFill>
+                  <a:srgbClr val="0B2A4A"/>
+                </a:solidFill>
+                <a:latin typeface="Calibri"/>
+              </a:rPr>
+              <a:t>Runs automation suite</a:t>
+            </a:r>
+          </a:p>
+        </p:txBody>
+      </p:sp>
+      <p:sp>
+        <p:nvSpPr>
+          <p:cNvPr id="16" name="Down Arrow 15"/>
           <p:cNvSpPr/>
           <p:nvPr/>
         </p:nvSpPr>
         <p:spPr>
           <a:xfrm>
-            <a:off x="5349240" y="914400"/>
-            <a:ext cx="2926080" cy="822960"/>
-          </a:xfrm>
-          <a:prstGeom prst="rect">
-            <a:avLst/>
-          </a:prstGeom>
-          <a:solidFill>
-            <a:srgbClr val="F2F5F9"/>
+            <a:off x="7360920" y="2656332"/>
+            <a:ext cx="274320" cy="109728"/>
+          </a:xfrm>
+          <a:prstGeom prst="downArrow">
+            <a:avLst/>
+          </a:prstGeom>
+          <a:solidFill>
+            <a:srgbClr val="F5A623"/>
           </a:solidFill>
           <a:ln>
             <a:noFill/>
@@ -7628,14 +7822,14 @@
       </p:sp>
       <p:sp>
         <p:nvSpPr>
-          <p:cNvPr id="14" name="Rectangle 13"/>
+          <p:cNvPr id="17" name="Rectangle 16"/>
           <p:cNvSpPr/>
           <p:nvPr/>
         </p:nvSpPr>
         <p:spPr>
           <a:xfrm>
-            <a:off x="5349240" y="914400"/>
-            <a:ext cx="137160" cy="822960"/>
+            <a:off x="6400800" y="2761488"/>
+            <a:ext cx="2194560" cy="685800"/>
           </a:xfrm>
           <a:prstGeom prst="rect">
             <a:avLst/>
@@ -7671,14 +7865,14 @@
       </p:sp>
       <p:sp>
         <p:nvSpPr>
-          <p:cNvPr id="15" name="TextBox 14"/>
+          <p:cNvPr id="18" name="TextBox 17"/>
           <p:cNvSpPr txBox="1"/>
           <p:nvPr/>
         </p:nvSpPr>
         <p:spPr>
           <a:xfrm>
-            <a:off x="5532120" y="987552"/>
-            <a:ext cx="2743200" cy="320040"/>
+            <a:off x="6400800" y="2935224"/>
+            <a:ext cx="2194560" cy="365760"/>
           </a:xfrm>
           <a:prstGeom prst="rect">
             <a:avLst/>
@@ -7691,82 +7885,35 @@
           </a:bodyPr>
           <a:lstStyle/>
           <a:p>
-            <a:pPr algn="l"/>
+            <a:pPr algn="ctr"/>
             <a:r>
               <a:rPr sz="1300" b="1">
                 <a:solidFill>
-                  <a:srgbClr val="2EA04F"/>
-                </a:solidFill>
-                <a:latin typeface="Calibri"/>
-              </a:rPr>
-              <a:t>Test / Framework Issue</a:t>
-            </a:r>
-          </a:p>
-        </p:txBody>
-      </p:sp>
-      <p:sp>
-        <p:nvSpPr>
-          <p:cNvPr id="16" name="TextBox 15"/>
-          <p:cNvSpPr txBox="1"/>
-          <p:nvPr/>
-        </p:nvSpPr>
-        <p:spPr>
-          <a:xfrm>
-            <a:off x="5532120" y="1280160"/>
-            <a:ext cx="2743200" cy="457200"/>
-          </a:xfrm>
-          <a:prstGeom prst="rect">
-            <a:avLst/>
-          </a:prstGeom>
-          <a:noFill/>
-        </p:spPr>
-        <p:txBody>
-          <a:bodyPr wrap="square" lIns="45720" rIns="45720" tIns="18288" bIns="18288">
-            <a:spAutoFit/>
-          </a:bodyPr>
-          <a:lstStyle/>
-          <a:p>
-            <a:pPr algn="l"/>
-            <a:r>
-              <a:rPr sz="1200" b="0">
-                <a:solidFill>
-                  <a:srgbClr val="0B2A4A"/>
-                </a:solidFill>
-                <a:latin typeface="Calibri"/>
-              </a:rPr>
-              <a:t>Copilot opens PR</a:t>
-            </a:r>
-          </a:p>
-          <a:p>
-            <a:pPr algn="l"/>
-            <a:r>
-              <a:rPr sz="1200" b="0">
-                <a:solidFill>
-                  <a:srgbClr val="0B2A4A"/>
-                </a:solidFill>
-                <a:latin typeface="Calibri"/>
-              </a:rPr>
-              <a:t>in automation repo</a:t>
-            </a:r>
-          </a:p>
-        </p:txBody>
-      </p:sp>
-      <p:sp>
-        <p:nvSpPr>
-          <p:cNvPr id="17" name="Right Arrow 16"/>
+                  <a:srgbClr val="FFFFFF"/>
+                </a:solidFill>
+                <a:latin typeface="Calibri"/>
+              </a:rPr>
+              <a:t>This repo</a:t>
+            </a:r>
+          </a:p>
+        </p:txBody>
+      </p:sp>
+      <p:sp>
+        <p:nvSpPr>
+          <p:cNvPr id="19" name="Rectangle 18"/>
           <p:cNvSpPr/>
           <p:nvPr/>
         </p:nvSpPr>
         <p:spPr>
           <a:xfrm>
-            <a:off x="8321040" y="1143000"/>
-            <a:ext cx="365760" cy="320040"/>
-          </a:xfrm>
-          <a:prstGeom prst="rightArrow">
-            <a:avLst/>
-          </a:prstGeom>
-          <a:solidFill>
-            <a:srgbClr val="F5A623"/>
+            <a:off x="8732520" y="2761488"/>
+            <a:ext cx="2971800" cy="685800"/>
+          </a:xfrm>
+          <a:prstGeom prst="rect">
+            <a:avLst/>
+          </a:prstGeom>
+          <a:solidFill>
+            <a:srgbClr val="F2F5F9"/>
           </a:solidFill>
           <a:ln>
             <a:noFill/>
@@ -7796,16 +7943,51 @@
       </p:sp>
       <p:sp>
         <p:nvSpPr>
-          <p:cNvPr id="18" name="Right Arrow 17"/>
+          <p:cNvPr id="20" name="TextBox 19"/>
+          <p:cNvSpPr txBox="1"/>
+          <p:nvPr/>
+        </p:nvSpPr>
+        <p:spPr>
+          <a:xfrm>
+            <a:off x="8869680" y="2962656"/>
+            <a:ext cx="2788920" cy="365760"/>
+          </a:xfrm>
+          <a:prstGeom prst="rect">
+            <a:avLst/>
+          </a:prstGeom>
+          <a:noFill/>
+        </p:spPr>
+        <p:txBody>
+          <a:bodyPr wrap="square" lIns="45720" rIns="45720" tIns="18288" bIns="18288">
+            <a:spAutoFit/>
+          </a:bodyPr>
+          <a:lstStyle/>
+          <a:p>
+            <a:pPr algn="l"/>
+            <a:r>
+              <a:rPr sz="1200" b="0">
+                <a:solidFill>
+                  <a:srgbClr val="0B2A4A"/>
+                </a:solidFill>
+                <a:latin typeface="Calibri"/>
+              </a:rPr>
+              <a:t>Structured results + AI analysis</a:t>
+            </a:r>
+          </a:p>
+        </p:txBody>
+      </p:sp>
+      <p:sp>
+        <p:nvSpPr>
+          <p:cNvPr id="21" name="Down Arrow 20"/>
           <p:cNvSpPr/>
           <p:nvPr/>
         </p:nvSpPr>
         <p:spPr>
           <a:xfrm>
-            <a:off x="4937760" y="3246120"/>
-            <a:ext cx="365760" cy="320040"/>
-          </a:xfrm>
-          <a:prstGeom prst="rightArrow">
+            <a:off x="7360920" y="3451860"/>
+            <a:ext cx="274320" cy="109728"/>
+          </a:xfrm>
+          <a:prstGeom prst="downArrow">
             <a:avLst/>
           </a:prstGeom>
           <a:solidFill>
@@ -7839,20 +8021,20 @@
       </p:sp>
       <p:sp>
         <p:nvSpPr>
-          <p:cNvPr id="19" name="Rectangle 18"/>
+          <p:cNvPr id="22" name="Rectangle 21"/>
           <p:cNvSpPr/>
           <p:nvPr/>
         </p:nvSpPr>
         <p:spPr>
           <a:xfrm>
-            <a:off x="5349240" y="3063240"/>
-            <a:ext cx="2926080" cy="822960"/>
-          </a:xfrm>
-          <a:prstGeom prst="rect">
-            <a:avLst/>
-          </a:prstGeom>
-          <a:solidFill>
-            <a:srgbClr val="F2F5F9"/>
+            <a:off x="6400800" y="3557016"/>
+            <a:ext cx="2194560" cy="685800"/>
+          </a:xfrm>
+          <a:prstGeom prst="rect">
+            <a:avLst/>
+          </a:prstGeom>
+          <a:solidFill>
+            <a:srgbClr val="0F8B8D"/>
           </a:solidFill>
           <a:ln>
             <a:noFill/>
@@ -7882,20 +8064,55 @@
       </p:sp>
       <p:sp>
         <p:nvSpPr>
-          <p:cNvPr id="20" name="Rectangle 19"/>
+          <p:cNvPr id="23" name="TextBox 22"/>
+          <p:cNvSpPr txBox="1"/>
+          <p:nvPr/>
+        </p:nvSpPr>
+        <p:spPr>
+          <a:xfrm>
+            <a:off x="6400800" y="3730752"/>
+            <a:ext cx="2194560" cy="365760"/>
+          </a:xfrm>
+          <a:prstGeom prst="rect">
+            <a:avLst/>
+          </a:prstGeom>
+          <a:noFill/>
+        </p:spPr>
+        <p:txBody>
+          <a:bodyPr wrap="square" lIns="45720" rIns="45720" tIns="18288" bIns="18288">
+            <a:spAutoFit/>
+          </a:bodyPr>
+          <a:lstStyle/>
+          <a:p>
+            <a:pPr algn="ctr"/>
+            <a:r>
+              <a:rPr sz="1300" b="1">
+                <a:solidFill>
+                  <a:srgbClr val="FFFFFF"/>
+                </a:solidFill>
+                <a:latin typeface="Calibri"/>
+              </a:rPr>
+              <a:t>Jira Test Management</a:t>
+            </a:r>
+          </a:p>
+        </p:txBody>
+      </p:sp>
+      <p:sp>
+        <p:nvSpPr>
+          <p:cNvPr id="24" name="Rectangle 23"/>
           <p:cNvSpPr/>
           <p:nvPr/>
         </p:nvSpPr>
         <p:spPr>
           <a:xfrm>
-            <a:off x="5349240" y="3063240"/>
-            <a:ext cx="137160" cy="822960"/>
-          </a:xfrm>
-          <a:prstGeom prst="rect">
-            <a:avLst/>
-          </a:prstGeom>
-          <a:solidFill>
-            <a:srgbClr val="F5A623"/>
+            <a:off x="8732520" y="3557016"/>
+            <a:ext cx="2971800" cy="685800"/>
+          </a:xfrm>
+          <a:prstGeom prst="rect">
+            <a:avLst/>
+          </a:prstGeom>
+          <a:solidFill>
+            <a:srgbClr val="F2F5F9"/>
           </a:solidFill>
           <a:ln>
             <a:noFill/>
@@ -7925,14 +8142,14 @@
       </p:sp>
       <p:sp>
         <p:nvSpPr>
-          <p:cNvPr id="21" name="TextBox 20"/>
+          <p:cNvPr id="25" name="TextBox 24"/>
           <p:cNvSpPr txBox="1"/>
           <p:nvPr/>
         </p:nvSpPr>
         <p:spPr>
           <a:xfrm>
-            <a:off x="5532120" y="3136392"/>
-            <a:ext cx="2743200" cy="320040"/>
+            <a:off x="8869680" y="3758184"/>
+            <a:ext cx="2788920" cy="365760"/>
           </a:xfrm>
           <a:prstGeom prst="rect">
             <a:avLst/>
@@ -7947,76 +8164,29 @@
           <a:p>
             <a:pPr algn="l"/>
             <a:r>
-              <a:rPr sz="1300" b="1">
-                <a:solidFill>
-                  <a:srgbClr val="F5A623"/>
-                </a:solidFill>
-                <a:latin typeface="Calibri"/>
-              </a:rPr>
-              <a:t>Environment / Data</a:t>
-            </a:r>
-          </a:p>
-        </p:txBody>
-      </p:sp>
-      <p:sp>
-        <p:nvSpPr>
-          <p:cNvPr id="22" name="TextBox 21"/>
-          <p:cNvSpPr txBox="1"/>
-          <p:nvPr/>
-        </p:nvSpPr>
-        <p:spPr>
-          <a:xfrm>
-            <a:off x="5532120" y="3429000"/>
-            <a:ext cx="2743200" cy="457200"/>
-          </a:xfrm>
-          <a:prstGeom prst="rect">
-            <a:avLst/>
-          </a:prstGeom>
-          <a:noFill/>
-        </p:spPr>
-        <p:txBody>
-          <a:bodyPr wrap="square" lIns="45720" rIns="45720" tIns="18288" bIns="18288">
-            <a:spAutoFit/>
-          </a:bodyPr>
-          <a:lstStyle/>
-          <a:p>
-            <a:pPr algn="l"/>
-            <a:r>
               <a:rPr sz="1200" b="0">
                 <a:solidFill>
                   <a:srgbClr val="0B2A4A"/>
                 </a:solidFill>
                 <a:latin typeface="Calibri"/>
               </a:rPr>
-              <a:t>Copilot pings DevOps</a:t>
-            </a:r>
-          </a:p>
-          <a:p>
-            <a:pPr algn="l"/>
-            <a:r>
-              <a:rPr sz="1200" b="0">
-                <a:solidFill>
-                  <a:srgbClr val="0B2A4A"/>
-                </a:solidFill>
-                <a:latin typeface="Calibri"/>
-              </a:rPr>
-              <a:t>+ opens infra ticket</a:t>
-            </a:r>
-          </a:p>
-        </p:txBody>
-      </p:sp>
-      <p:sp>
-        <p:nvSpPr>
-          <p:cNvPr id="23" name="Right Arrow 22"/>
+              <a:t>Test cycle updated (Xray / Zephyr)</a:t>
+            </a:r>
+          </a:p>
+        </p:txBody>
+      </p:sp>
+      <p:sp>
+        <p:nvSpPr>
+          <p:cNvPr id="26" name="Down Arrow 25"/>
           <p:cNvSpPr/>
           <p:nvPr/>
         </p:nvSpPr>
         <p:spPr>
           <a:xfrm>
-            <a:off x="8321040" y="3291840"/>
-            <a:ext cx="365760" cy="320040"/>
-          </a:xfrm>
-          <a:prstGeom prst="rightArrow">
+            <a:off x="7360920" y="4247388"/>
+            <a:ext cx="274320" cy="109728"/>
+          </a:xfrm>
+          <a:prstGeom prst="downArrow">
             <a:avLst/>
           </a:prstGeom>
           <a:solidFill>
@@ -8050,16 +8220,16 @@
       </p:sp>
       <p:sp>
         <p:nvSpPr>
-          <p:cNvPr id="24" name="Right Arrow 23"/>
+          <p:cNvPr id="27" name="Rectangle 26"/>
           <p:cNvSpPr/>
           <p:nvPr/>
         </p:nvSpPr>
         <p:spPr>
           <a:xfrm>
-            <a:off x="4937760" y="5394960"/>
-            <a:ext cx="365760" cy="320040"/>
-          </a:xfrm>
-          <a:prstGeom prst="rightArrow">
+            <a:off x="6400800" y="4352544"/>
+            <a:ext cx="2194560" cy="685800"/>
+          </a:xfrm>
+          <a:prstGeom prst="rect">
             <a:avLst/>
           </a:prstGeom>
           <a:solidFill>
@@ -8093,14 +8263,49 @@
       </p:sp>
       <p:sp>
         <p:nvSpPr>
-          <p:cNvPr id="25" name="Rectangle 24"/>
+          <p:cNvPr id="28" name="TextBox 27"/>
+          <p:cNvSpPr txBox="1"/>
+          <p:nvPr/>
+        </p:nvSpPr>
+        <p:spPr>
+          <a:xfrm>
+            <a:off x="6400800" y="4526280"/>
+            <a:ext cx="2194560" cy="365760"/>
+          </a:xfrm>
+          <a:prstGeom prst="rect">
+            <a:avLst/>
+          </a:prstGeom>
+          <a:noFill/>
+        </p:spPr>
+        <p:txBody>
+          <a:bodyPr wrap="square" lIns="45720" rIns="45720" tIns="18288" bIns="18288">
+            <a:spAutoFit/>
+          </a:bodyPr>
+          <a:lstStyle/>
+          <a:p>
+            <a:pPr algn="ctr"/>
+            <a:r>
+              <a:rPr sz="1300" b="1">
+                <a:solidFill>
+                  <a:srgbClr val="FFFFFF"/>
+                </a:solidFill>
+                <a:latin typeface="Calibri"/>
+              </a:rPr>
+              <a:t>Jira bug</a:t>
+            </a:r>
+          </a:p>
+        </p:txBody>
+      </p:sp>
+      <p:sp>
+        <p:nvSpPr>
+          <p:cNvPr id="29" name="Rectangle 28"/>
           <p:cNvSpPr/>
           <p:nvPr/>
         </p:nvSpPr>
         <p:spPr>
           <a:xfrm>
-            <a:off x="5349240" y="5212080"/>
-            <a:ext cx="2926080" cy="822960"/>
+            <a:off x="8732520" y="4352544"/>
+            <a:ext cx="2971800" cy="685800"/>
           </a:xfrm>
           <a:prstGeom prst="rect">
             <a:avLst/>
@@ -8136,20 +8341,55 @@
       </p:sp>
       <p:sp>
         <p:nvSpPr>
-          <p:cNvPr id="26" name="Rectangle 25"/>
+          <p:cNvPr id="30" name="TextBox 29"/>
+          <p:cNvSpPr txBox="1"/>
+          <p:nvPr/>
+        </p:nvSpPr>
+        <p:spPr>
+          <a:xfrm>
+            <a:off x="8869680" y="4553712"/>
+            <a:ext cx="2788920" cy="365760"/>
+          </a:xfrm>
+          <a:prstGeom prst="rect">
+            <a:avLst/>
+          </a:prstGeom>
+          <a:noFill/>
+        </p:spPr>
+        <p:txBody>
+          <a:bodyPr wrap="square" lIns="45720" rIns="45720" tIns="18288" bIns="18288">
+            <a:spAutoFit/>
+          </a:bodyPr>
+          <a:lstStyle/>
+          <a:p>
+            <a:pPr algn="l"/>
+            <a:r>
+              <a:rPr sz="1200" b="0">
+                <a:solidFill>
+                  <a:srgbClr val="0B2A4A"/>
+                </a:solidFill>
+                <a:latin typeface="Calibri"/>
+              </a:rPr>
+              <a:t>Auto-linked to the failed test</a:t>
+            </a:r>
+          </a:p>
+        </p:txBody>
+      </p:sp>
+      <p:sp>
+        <p:nvSpPr>
+          <p:cNvPr id="31" name="Down Arrow 30"/>
           <p:cNvSpPr/>
           <p:nvPr/>
         </p:nvSpPr>
         <p:spPr>
           <a:xfrm>
-            <a:off x="5349240" y="5212080"/>
-            <a:ext cx="137160" cy="822960"/>
-          </a:xfrm>
-          <a:prstGeom prst="rect">
-            <a:avLst/>
-          </a:prstGeom>
-          <a:solidFill>
-            <a:srgbClr val="1F6FB5"/>
+            <a:off x="7360920" y="5042916"/>
+            <a:ext cx="274320" cy="109728"/>
+          </a:xfrm>
+          <a:prstGeom prst="downArrow">
+            <a:avLst/>
+          </a:prstGeom>
+          <a:solidFill>
+            <a:srgbClr val="F5A623"/>
           </a:solidFill>
           <a:ln>
             <a:noFill/>
@@ -8179,102 +8419,20 @@
       </p:sp>
       <p:sp>
         <p:nvSpPr>
-          <p:cNvPr id="27" name="TextBox 26"/>
-          <p:cNvSpPr txBox="1"/>
-          <p:nvPr/>
-        </p:nvSpPr>
-        <p:spPr>
-          <a:xfrm>
-            <a:off x="5532120" y="5285232"/>
-            <a:ext cx="2743200" cy="320040"/>
-          </a:xfrm>
-          <a:prstGeom prst="rect">
-            <a:avLst/>
-          </a:prstGeom>
-          <a:noFill/>
-        </p:spPr>
-        <p:txBody>
-          <a:bodyPr wrap="square" lIns="45720" rIns="45720" tIns="18288" bIns="18288">
-            <a:spAutoFit/>
-          </a:bodyPr>
-          <a:lstStyle/>
-          <a:p>
-            <a:pPr algn="l"/>
-            <a:r>
-              <a:rPr sz="1300" b="1">
-                <a:solidFill>
-                  <a:srgbClr val="1F6FB5"/>
-                </a:solidFill>
-                <a:latin typeface="Calibri"/>
-              </a:rPr>
-              <a:t>Real Product Bug</a:t>
-            </a:r>
-          </a:p>
-        </p:txBody>
-      </p:sp>
-      <p:sp>
-        <p:nvSpPr>
-          <p:cNvPr id="28" name="TextBox 27"/>
-          <p:cNvSpPr txBox="1"/>
-          <p:nvPr/>
-        </p:nvSpPr>
-        <p:spPr>
-          <a:xfrm>
-            <a:off x="5532120" y="5577840"/>
-            <a:ext cx="2743200" cy="457200"/>
-          </a:xfrm>
-          <a:prstGeom prst="rect">
-            <a:avLst/>
-          </a:prstGeom>
-          <a:noFill/>
-        </p:spPr>
-        <p:txBody>
-          <a:bodyPr wrap="square" lIns="45720" rIns="45720" tIns="18288" bIns="18288">
-            <a:spAutoFit/>
-          </a:bodyPr>
-          <a:lstStyle/>
-          <a:p>
-            <a:pPr algn="l"/>
-            <a:r>
-              <a:rPr sz="1200" b="0">
-                <a:solidFill>
-                  <a:srgbClr val="0B2A4A"/>
-                </a:solidFill>
-                <a:latin typeface="Calibri"/>
-              </a:rPr>
-              <a:t>Copilot creates Jira</a:t>
-            </a:r>
-          </a:p>
-          <a:p>
-            <a:pPr algn="l"/>
-            <a:r>
-              <a:rPr sz="1200" b="0">
-                <a:solidFill>
-                  <a:srgbClr val="0B2A4A"/>
-                </a:solidFill>
-                <a:latin typeface="Calibri"/>
-              </a:rPr>
-              <a:t>via Jira MCP</a:t>
-            </a:r>
-          </a:p>
-        </p:txBody>
-      </p:sp>
-      <p:sp>
-        <p:nvSpPr>
-          <p:cNvPr id="29" name="Right Arrow 28"/>
+          <p:cNvPr id="32" name="Rectangle 31"/>
           <p:cNvSpPr/>
           <p:nvPr/>
         </p:nvSpPr>
         <p:spPr>
           <a:xfrm>
-            <a:off x="8321040" y="5440680"/>
-            <a:ext cx="365760" cy="320040"/>
-          </a:xfrm>
-          <a:prstGeom prst="rightArrow">
-            <a:avLst/>
-          </a:prstGeom>
-          <a:solidFill>
-            <a:srgbClr val="F5A623"/>
+            <a:off x="6400800" y="5148072"/>
+            <a:ext cx="2194560" cy="685800"/>
+          </a:xfrm>
+          <a:prstGeom prst="rect">
+            <a:avLst/>
+          </a:prstGeom>
+          <a:solidFill>
+            <a:srgbClr val="7A3FA6"/>
           </a:solidFill>
           <a:ln>
             <a:noFill/>
@@ -8304,20 +8462,55 @@
       </p:sp>
       <p:sp>
         <p:nvSpPr>
-          <p:cNvPr id="30" name="Rectangle 29"/>
+          <p:cNvPr id="33" name="TextBox 32"/>
+          <p:cNvSpPr txBox="1"/>
+          <p:nvPr/>
+        </p:nvSpPr>
+        <p:spPr>
+          <a:xfrm>
+            <a:off x="6400800" y="5321808"/>
+            <a:ext cx="2194560" cy="365760"/>
+          </a:xfrm>
+          <a:prstGeom prst="rect">
+            <a:avLst/>
+          </a:prstGeom>
+          <a:noFill/>
+        </p:spPr>
+        <p:txBody>
+          <a:bodyPr wrap="square" lIns="45720" rIns="45720" tIns="18288" bIns="18288">
+            <a:spAutoFit/>
+          </a:bodyPr>
+          <a:lstStyle/>
+          <a:p>
+            <a:pPr algn="ctr"/>
+            <a:r>
+              <a:rPr sz="1300" b="1">
+                <a:solidFill>
+                  <a:srgbClr val="FFFFFF"/>
+                </a:solidFill>
+                <a:latin typeface="Calibri"/>
+              </a:rPr>
+              <a:t>Requirement</a:t>
+            </a:r>
+          </a:p>
+        </p:txBody>
+      </p:sp>
+      <p:sp>
+        <p:nvSpPr>
+          <p:cNvPr id="34" name="Rectangle 33"/>
           <p:cNvSpPr/>
           <p:nvPr/>
         </p:nvSpPr>
         <p:spPr>
           <a:xfrm>
-            <a:off x="8732520" y="914400"/>
-            <a:ext cx="2926080" cy="822960"/>
-          </a:xfrm>
-          <a:prstGeom prst="rect">
-            <a:avLst/>
-          </a:prstGeom>
-          <a:solidFill>
-            <a:srgbClr val="2EA04F"/>
+            <a:off x="8732520" y="5148072"/>
+            <a:ext cx="2971800" cy="685800"/>
+          </a:xfrm>
+          <a:prstGeom prst="rect">
+            <a:avLst/>
+          </a:prstGeom>
+          <a:solidFill>
+            <a:srgbClr val="F2F5F9"/>
           </a:solidFill>
           <a:ln>
             <a:noFill/>
@@ -8347,14 +8540,14 @@
       </p:sp>
       <p:sp>
         <p:nvSpPr>
-          <p:cNvPr id="31" name="TextBox 30"/>
+          <p:cNvPr id="35" name="TextBox 34"/>
           <p:cNvSpPr txBox="1"/>
           <p:nvPr/>
         </p:nvSpPr>
         <p:spPr>
           <a:xfrm>
-            <a:off x="8732520" y="1143000"/>
-            <a:ext cx="2926080" cy="457200"/>
+            <a:off x="8869680" y="5349240"/>
+            <a:ext cx="2788920" cy="365760"/>
           </a:xfrm>
           <a:prstGeom prst="rect">
             <a:avLst/>
@@ -8367,35 +8560,35 @@
           </a:bodyPr>
           <a:lstStyle/>
           <a:p>
-            <a:pPr algn="ctr"/>
-            <a:r>
-              <a:rPr sz="1600" b="1">
-                <a:solidFill>
-                  <a:srgbClr val="FFFFFF"/>
-                </a:solidFill>
-                <a:latin typeface="Calibri"/>
-              </a:rPr>
-              <a:t>PR opened</a:t>
-            </a:r>
-          </a:p>
-        </p:txBody>
-      </p:sp>
-      <p:sp>
-        <p:nvSpPr>
-          <p:cNvPr id="32" name="Rectangle 31"/>
+            <a:pPr algn="l"/>
+            <a:r>
+              <a:rPr sz="1200" b="0">
+                <a:solidFill>
+                  <a:srgbClr val="0B2A4A"/>
+                </a:solidFill>
+                <a:latin typeface="Calibri"/>
+              </a:rPr>
+              <a:t>Traceability chain complete</a:t>
+            </a:r>
+          </a:p>
+        </p:txBody>
+      </p:sp>
+      <p:sp>
+        <p:nvSpPr>
+          <p:cNvPr id="36" name="Rectangle 35"/>
           <p:cNvSpPr/>
           <p:nvPr/>
         </p:nvSpPr>
         <p:spPr>
           <a:xfrm>
-            <a:off x="8732520" y="3063240"/>
-            <a:ext cx="2926080" cy="822960"/>
-          </a:xfrm>
-          <a:prstGeom prst="rect">
-            <a:avLst/>
-          </a:prstGeom>
-          <a:solidFill>
-            <a:srgbClr val="F5A623"/>
+            <a:off x="0" y="6583680"/>
+            <a:ext cx="12191695" cy="274320"/>
+          </a:xfrm>
+          <a:prstGeom prst="rect">
+            <a:avLst/>
+          </a:prstGeom>
+          <a:solidFill>
+            <a:srgbClr val="F2F5F9"/>
           </a:solidFill>
           <a:ln>
             <a:noFill/>
@@ -8425,14 +8618,14 @@
       </p:sp>
       <p:sp>
         <p:nvSpPr>
-          <p:cNvPr id="33" name="TextBox 32"/>
+          <p:cNvPr id="37" name="TextBox 36"/>
           <p:cNvSpPr txBox="1"/>
           <p:nvPr/>
         </p:nvSpPr>
         <p:spPr>
           <a:xfrm>
-            <a:off x="8732520" y="3291840"/>
-            <a:ext cx="2926080" cy="457200"/>
+            <a:off x="457200" y="6601968"/>
+            <a:ext cx="9144000" cy="256032"/>
           </a:xfrm>
           <a:prstGeom prst="rect">
             <a:avLst/>
@@ -8445,213 +8638,22 @@
           </a:bodyPr>
           <a:lstStyle/>
           <a:p>
-            <a:pPr algn="ctr"/>
-            <a:r>
-              <a:rPr sz="1600" b="1">
-                <a:solidFill>
-                  <a:srgbClr val="FFFFFF"/>
-                </a:solidFill>
-                <a:latin typeface="Calibri"/>
-              </a:rPr>
-              <a:t>Env fixed</a:t>
-            </a:r>
-          </a:p>
-        </p:txBody>
-      </p:sp>
-      <p:sp>
-        <p:nvSpPr>
-          <p:cNvPr id="34" name="Rectangle 33"/>
-          <p:cNvSpPr/>
-          <p:nvPr/>
-        </p:nvSpPr>
-        <p:spPr>
-          <a:xfrm>
-            <a:off x="8732520" y="5212080"/>
-            <a:ext cx="2926080" cy="822960"/>
-          </a:xfrm>
-          <a:prstGeom prst="rect">
-            <a:avLst/>
-          </a:prstGeom>
-          <a:solidFill>
-            <a:srgbClr val="1F6FB5"/>
-          </a:solidFill>
-          <a:ln>
-            <a:noFill/>
-          </a:ln>
-        </p:spPr>
-        <p:style>
-          <a:lnRef idx="1">
-            <a:schemeClr val="accent1"/>
-          </a:lnRef>
-          <a:fillRef idx="3">
-            <a:schemeClr val="accent1"/>
-          </a:fillRef>
-          <a:effectRef idx="2">
-            <a:schemeClr val="accent1"/>
-          </a:effectRef>
-          <a:fontRef idx="minor">
-            <a:schemeClr val="lt1"/>
-          </a:fontRef>
-        </p:style>
-        <p:txBody>
-          <a:bodyPr rtlCol="0" anchor="ctr"/>
-          <a:lstStyle/>
-          <a:p>
-            <a:pPr algn="ctr"/>
-          </a:p>
-        </p:txBody>
-      </p:sp>
-      <p:sp>
-        <p:nvSpPr>
-          <p:cNvPr id="35" name="TextBox 34"/>
-          <p:cNvSpPr txBox="1"/>
-          <p:nvPr/>
-        </p:nvSpPr>
-        <p:spPr>
-          <a:xfrm>
-            <a:off x="8732520" y="5440680"/>
-            <a:ext cx="2926080" cy="457200"/>
-          </a:xfrm>
-          <a:prstGeom prst="rect">
-            <a:avLst/>
-          </a:prstGeom>
-          <a:noFill/>
-        </p:spPr>
-        <p:txBody>
-          <a:bodyPr wrap="square" lIns="45720" rIns="45720" tIns="18288" bIns="18288">
-            <a:spAutoFit/>
-          </a:bodyPr>
-          <a:lstStyle/>
-          <a:p>
-            <a:pPr algn="ctr"/>
-            <a:r>
-              <a:rPr sz="1600" b="1">
-                <a:solidFill>
-                  <a:srgbClr val="FFFFFF"/>
-                </a:solidFill>
-                <a:latin typeface="Calibri"/>
-              </a:rPr>
-              <a:t>Jira raised</a:t>
-            </a:r>
-          </a:p>
-        </p:txBody>
-      </p:sp>
-      <p:sp>
-        <p:nvSpPr>
-          <p:cNvPr id="36" name="TextBox 35"/>
-          <p:cNvSpPr txBox="1"/>
-          <p:nvPr/>
-        </p:nvSpPr>
-        <p:spPr>
-          <a:xfrm>
-            <a:off x="457200" y="6035040"/>
-            <a:ext cx="10972800" cy="365760"/>
-          </a:xfrm>
-          <a:prstGeom prst="rect">
-            <a:avLst/>
-          </a:prstGeom>
-          <a:noFill/>
-        </p:spPr>
-        <p:txBody>
-          <a:bodyPr wrap="square" lIns="45720" rIns="45720" tIns="18288" bIns="18288">
-            <a:spAutoFit/>
-          </a:bodyPr>
-          <a:lstStyle/>
-          <a:p>
-            <a:pPr algn="ctr"/>
-            <a:r>
-              <a:rPr sz="1400" b="1">
+            <a:pPr algn="l"/>
+            <a:r>
+              <a:rPr sz="1000" b="0">
                 <a:solidFill>
                   <a:srgbClr val="555C66"/>
                 </a:solidFill>
                 <a:latin typeface="Calibri"/>
               </a:rPr>
-              <a:t>Humans review the PR / ticket — Copilot never merges directly.</a:t>
-            </a:r>
-          </a:p>
-        </p:txBody>
-      </p:sp>
-      <p:sp>
-        <p:nvSpPr>
-          <p:cNvPr id="37" name="Rectangle 36"/>
-          <p:cNvSpPr/>
-          <p:nvPr/>
-        </p:nvSpPr>
-        <p:spPr>
-          <a:xfrm>
-            <a:off x="0" y="6583680"/>
-            <a:ext cx="12191695" cy="274320"/>
-          </a:xfrm>
-          <a:prstGeom prst="rect">
-            <a:avLst/>
-          </a:prstGeom>
-          <a:solidFill>
-            <a:srgbClr val="F2F5F9"/>
-          </a:solidFill>
-          <a:ln>
-            <a:noFill/>
-          </a:ln>
-        </p:spPr>
-        <p:style>
-          <a:lnRef idx="1">
-            <a:schemeClr val="accent1"/>
-          </a:lnRef>
-          <a:fillRef idx="3">
-            <a:schemeClr val="accent1"/>
-          </a:fillRef>
-          <a:effectRef idx="2">
-            <a:schemeClr val="accent1"/>
-          </a:effectRef>
-          <a:fontRef idx="minor">
-            <a:schemeClr val="lt1"/>
-          </a:fontRef>
-        </p:style>
-        <p:txBody>
-          <a:bodyPr rtlCol="0" anchor="ctr"/>
-          <a:lstStyle/>
-          <a:p>
-            <a:pPr algn="ctr"/>
+              <a:t>AI-Assisted Test Automation Reporting  |  Demo for Management</a:t>
+            </a:r>
           </a:p>
         </p:txBody>
       </p:sp>
       <p:sp>
         <p:nvSpPr>
           <p:cNvPr id="38" name="TextBox 37"/>
-          <p:cNvSpPr txBox="1"/>
-          <p:nvPr/>
-        </p:nvSpPr>
-        <p:spPr>
-          <a:xfrm>
-            <a:off x="457200" y="6601968"/>
-            <a:ext cx="9144000" cy="256032"/>
-          </a:xfrm>
-          <a:prstGeom prst="rect">
-            <a:avLst/>
-          </a:prstGeom>
-          <a:noFill/>
-        </p:spPr>
-        <p:txBody>
-          <a:bodyPr wrap="square" lIns="45720" rIns="45720" tIns="18288" bIns="18288">
-            <a:spAutoFit/>
-          </a:bodyPr>
-          <a:lstStyle/>
-          <a:p>
-            <a:pPr algn="l"/>
-            <a:r>
-              <a:rPr sz="1000" b="0">
-                <a:solidFill>
-                  <a:srgbClr val="555C66"/>
-                </a:solidFill>
-                <a:latin typeface="Calibri"/>
-              </a:rPr>
-              <a:t>AI-Assisted Test Automation Reporting  |  Demo for Management</a:t>
-            </a:r>
-          </a:p>
-        </p:txBody>
-      </p:sp>
-      <p:sp>
-        <p:nvSpPr>
-          <p:cNvPr id="39" name="TextBox 38"/>
           <p:cNvSpPr txBox="1"/>
           <p:nvPr/>
         </p:nvSpPr>
@@ -8861,7 +8863,7 @@
                 </a:solidFill>
                 <a:latin typeface="Calibri"/>
               </a:rPr>
-              <a:t>Further Enhancements</a:t>
+              <a:t>Future Flow</a:t>
             </a:r>
           </a:p>
         </p:txBody>
@@ -8896,7 +8898,7 @@
                 </a:solidFill>
                 <a:latin typeface="Calibri"/>
               </a:rPr>
-              <a:t>Ideas worth exploring next</a:t>
+              <a:t>What happens automatically after a failure</a:t>
             </a:r>
           </a:p>
         </p:txBody>
@@ -8909,14 +8911,14 @@
         </p:nvSpPr>
         <p:spPr>
           <a:xfrm>
-            <a:off x="548640" y="1417320"/>
-            <a:ext cx="5623560" cy="868680"/>
-          </a:xfrm>
-          <a:prstGeom prst="rect">
-            <a:avLst/>
-          </a:prstGeom>
-          <a:solidFill>
-            <a:srgbClr val="F2F5F9"/>
+            <a:off x="457200" y="1828800"/>
+            <a:ext cx="1737360" cy="1005840"/>
+          </a:xfrm>
+          <a:prstGeom prst="rect">
+            <a:avLst/>
+          </a:prstGeom>
+          <a:solidFill>
+            <a:srgbClr val="C92A2A"/>
           </a:solidFill>
           <a:ln>
             <a:noFill/>
@@ -8952,8 +8954,8 @@
         </p:nvSpPr>
         <p:spPr>
           <a:xfrm>
-            <a:off x="731520" y="1508760"/>
-            <a:ext cx="5394960" cy="365760"/>
+            <a:off x="457200" y="2011680"/>
+            <a:ext cx="1737360" cy="640080"/>
           </a:xfrm>
           <a:prstGeom prst="rect">
             <a:avLst/>
@@ -8966,70 +8968,35 @@
           </a:bodyPr>
           <a:lstStyle/>
           <a:p>
-            <a:pPr algn="l"/>
-            <a:r>
-              <a:rPr sz="1500" b="1">
-                <a:solidFill>
-                  <a:srgbClr val="1F6FB5"/>
-                </a:solidFill>
-                <a:latin typeface="Calibri"/>
-              </a:rPr>
-              <a:t>🔔  Slack / Teams alerts</a:t>
-            </a:r>
-          </a:p>
-        </p:txBody>
-      </p:sp>
-      <p:sp>
-        <p:nvSpPr>
-          <p:cNvPr id="9" name="TextBox 8"/>
-          <p:cNvSpPr txBox="1"/>
-          <p:nvPr/>
-        </p:nvSpPr>
-        <p:spPr>
-          <a:xfrm>
-            <a:off x="731520" y="1856232"/>
-            <a:ext cx="5394960" cy="365760"/>
-          </a:xfrm>
-          <a:prstGeom prst="rect">
-            <a:avLst/>
-          </a:prstGeom>
-          <a:noFill/>
-        </p:spPr>
-        <p:txBody>
-          <a:bodyPr wrap="square" lIns="45720" rIns="45720" tIns="18288" bIns="18288">
-            <a:spAutoFit/>
-          </a:bodyPr>
-          <a:lstStyle/>
-          <a:p>
-            <a:pPr algn="l"/>
-            <a:r>
-              <a:rPr sz="1300" b="0">
-                <a:solidFill>
-                  <a:srgbClr val="0B2A4A"/>
-                </a:solidFill>
-                <a:latin typeface="Calibri"/>
-              </a:rPr>
-              <a:t>Instant notification per failure with AI summary link</a:t>
-            </a:r>
-          </a:p>
-        </p:txBody>
-      </p:sp>
-      <p:sp>
-        <p:nvSpPr>
-          <p:cNvPr id="10" name="Rectangle 9"/>
+            <a:pPr algn="ctr"/>
+            <a:r>
+              <a:rPr sz="1700" b="1">
+                <a:solidFill>
+                  <a:srgbClr val="FFFFFF"/>
+                </a:solidFill>
+                <a:latin typeface="Calibri"/>
+              </a:rPr>
+              <a:t>Build Fails</a:t>
+            </a:r>
+          </a:p>
+        </p:txBody>
+      </p:sp>
+      <p:sp>
+        <p:nvSpPr>
+          <p:cNvPr id="9" name="Right Arrow 8"/>
           <p:cNvSpPr/>
           <p:nvPr/>
         </p:nvSpPr>
         <p:spPr>
           <a:xfrm>
-            <a:off x="6355080" y="1417320"/>
-            <a:ext cx="5623560" cy="868680"/>
-          </a:xfrm>
-          <a:prstGeom prst="rect">
-            <a:avLst/>
-          </a:prstGeom>
-          <a:solidFill>
-            <a:srgbClr val="F2F5F9"/>
+            <a:off x="2240280" y="2148840"/>
+            <a:ext cx="365760" cy="365760"/>
+          </a:xfrm>
+          <a:prstGeom prst="rightArrow">
+            <a:avLst/>
+          </a:prstGeom>
+          <a:solidFill>
+            <a:srgbClr val="F5A623"/>
           </a:solidFill>
           <a:ln>
             <a:noFill/>
@@ -9059,90 +9026,20 @@
       </p:sp>
       <p:sp>
         <p:nvSpPr>
-          <p:cNvPr id="11" name="TextBox 10"/>
-          <p:cNvSpPr txBox="1"/>
-          <p:nvPr/>
-        </p:nvSpPr>
-        <p:spPr>
-          <a:xfrm>
-            <a:off x="6537960" y="1508760"/>
-            <a:ext cx="5394960" cy="365760"/>
-          </a:xfrm>
-          <a:prstGeom prst="rect">
-            <a:avLst/>
-          </a:prstGeom>
-          <a:noFill/>
-        </p:spPr>
-        <p:txBody>
-          <a:bodyPr wrap="square" lIns="45720" rIns="45720" tIns="18288" bIns="18288">
-            <a:spAutoFit/>
-          </a:bodyPr>
-          <a:lstStyle/>
-          <a:p>
-            <a:pPr algn="l"/>
-            <a:r>
-              <a:rPr sz="1500" b="1">
-                <a:solidFill>
-                  <a:srgbClr val="1F6FB5"/>
-                </a:solidFill>
-                <a:latin typeface="Calibri"/>
-              </a:rPr>
-              <a:t>📱  Live dashboard site</a:t>
-            </a:r>
-          </a:p>
-        </p:txBody>
-      </p:sp>
-      <p:sp>
-        <p:nvSpPr>
-          <p:cNvPr id="12" name="TextBox 11"/>
-          <p:cNvSpPr txBox="1"/>
-          <p:nvPr/>
-        </p:nvSpPr>
-        <p:spPr>
-          <a:xfrm>
-            <a:off x="6537960" y="1856232"/>
-            <a:ext cx="5394960" cy="365760"/>
-          </a:xfrm>
-          <a:prstGeom prst="rect">
-            <a:avLst/>
-          </a:prstGeom>
-          <a:noFill/>
-        </p:spPr>
-        <p:txBody>
-          <a:bodyPr wrap="square" lIns="45720" rIns="45720" tIns="18288" bIns="18288">
-            <a:spAutoFit/>
-          </a:bodyPr>
-          <a:lstStyle/>
-          <a:p>
-            <a:pPr algn="l"/>
-            <a:r>
-              <a:rPr sz="1300" b="0">
-                <a:solidFill>
-                  <a:srgbClr val="0B2A4A"/>
-                </a:solidFill>
-                <a:latin typeface="Calibri"/>
-              </a:rPr>
-              <a:t>GitHub Pages site with real-time build health &amp; MTTR</a:t>
-            </a:r>
-          </a:p>
-        </p:txBody>
-      </p:sp>
-      <p:sp>
-        <p:nvSpPr>
-          <p:cNvPr id="13" name="Rectangle 12"/>
+          <p:cNvPr id="10" name="Rectangle 9"/>
           <p:cNvSpPr/>
           <p:nvPr/>
         </p:nvSpPr>
         <p:spPr>
           <a:xfrm>
-            <a:off x="548640" y="2377440"/>
-            <a:ext cx="5623560" cy="868680"/>
-          </a:xfrm>
-          <a:prstGeom prst="rect">
-            <a:avLst/>
-          </a:prstGeom>
-          <a:solidFill>
-            <a:srgbClr val="F2F5F9"/>
+            <a:off x="2697480" y="1828800"/>
+            <a:ext cx="2194560" cy="1005840"/>
+          </a:xfrm>
+          <a:prstGeom prst="rect">
+            <a:avLst/>
+          </a:prstGeom>
+          <a:solidFill>
+            <a:srgbClr val="7A3FA6"/>
           </a:solidFill>
           <a:ln>
             <a:noFill/>
@@ -9172,14 +9069,14 @@
       </p:sp>
       <p:sp>
         <p:nvSpPr>
-          <p:cNvPr id="14" name="TextBox 13"/>
+          <p:cNvPr id="11" name="TextBox 10"/>
           <p:cNvSpPr txBox="1"/>
           <p:nvPr/>
         </p:nvSpPr>
         <p:spPr>
           <a:xfrm>
-            <a:off x="731520" y="2468880"/>
-            <a:ext cx="5394960" cy="365760"/>
+            <a:off x="2697480" y="1965960"/>
+            <a:ext cx="2194560" cy="731520"/>
           </a:xfrm>
           <a:prstGeom prst="rect">
             <a:avLst/>
@@ -9192,70 +9089,47 @@
           </a:bodyPr>
           <a:lstStyle/>
           <a:p>
-            <a:pPr algn="l"/>
+            <a:pPr algn="ctr"/>
             <a:r>
               <a:rPr sz="1500" b="1">
                 <a:solidFill>
-                  <a:srgbClr val="1F6FB5"/>
-                </a:solidFill>
-                <a:latin typeface="Calibri"/>
-              </a:rPr>
-              <a:t>🕵️  Flaky-test detector</a:t>
-            </a:r>
-          </a:p>
-        </p:txBody>
-      </p:sp>
-      <p:sp>
-        <p:nvSpPr>
-          <p:cNvPr id="15" name="TextBox 14"/>
-          <p:cNvSpPr txBox="1"/>
-          <p:nvPr/>
-        </p:nvSpPr>
-        <p:spPr>
-          <a:xfrm>
-            <a:off x="731520" y="2816352"/>
-            <a:ext cx="5394960" cy="365760"/>
-          </a:xfrm>
-          <a:prstGeom prst="rect">
-            <a:avLst/>
-          </a:prstGeom>
-          <a:noFill/>
-        </p:spPr>
-        <p:txBody>
-          <a:bodyPr wrap="square" lIns="45720" rIns="45720" tIns="18288" bIns="18288">
-            <a:spAutoFit/>
-          </a:bodyPr>
-          <a:lstStyle/>
-          <a:p>
-            <a:pPr algn="l"/>
-            <a:r>
-              <a:rPr sz="1300" b="0">
-                <a:solidFill>
-                  <a:srgbClr val="0B2A4A"/>
-                </a:solidFill>
-                <a:latin typeface="Calibri"/>
-              </a:rPr>
-              <a:t>Score tests by instability, auto-quarantine noisy ones</a:t>
-            </a:r>
-          </a:p>
-        </p:txBody>
-      </p:sp>
-      <p:sp>
-        <p:nvSpPr>
-          <p:cNvPr id="16" name="Rectangle 15"/>
+                  <a:srgbClr val="FFFFFF"/>
+                </a:solidFill>
+                <a:latin typeface="Calibri"/>
+              </a:rPr>
+              <a:t>AI Classifier</a:t>
+            </a:r>
+          </a:p>
+          <a:p>
+            <a:pPr algn="ctr"/>
+            <a:r>
+              <a:rPr sz="1500" b="1">
+                <a:solidFill>
+                  <a:srgbClr val="FFFFFF"/>
+                </a:solidFill>
+                <a:latin typeface="Calibri"/>
+              </a:rPr>
+              <a:t>(Copilot)</a:t>
+            </a:r>
+          </a:p>
+        </p:txBody>
+      </p:sp>
+      <p:sp>
+        <p:nvSpPr>
+          <p:cNvPr id="12" name="Right Arrow 11"/>
           <p:cNvSpPr/>
           <p:nvPr/>
         </p:nvSpPr>
         <p:spPr>
           <a:xfrm>
-            <a:off x="6355080" y="2377440"/>
-            <a:ext cx="5623560" cy="868680"/>
-          </a:xfrm>
-          <a:prstGeom prst="rect">
-            <a:avLst/>
-          </a:prstGeom>
-          <a:solidFill>
-            <a:srgbClr val="F2F5F9"/>
+            <a:off x="4937760" y="868680"/>
+            <a:ext cx="365760" cy="274320"/>
+          </a:xfrm>
+          <a:prstGeom prst="rightArrow">
+            <a:avLst/>
+          </a:prstGeom>
+          <a:solidFill>
+            <a:srgbClr val="F5A623"/>
           </a:solidFill>
           <a:ln>
             <a:noFill/>
@@ -9285,84 +9159,14 @@
       </p:sp>
       <p:sp>
         <p:nvSpPr>
-          <p:cNvPr id="17" name="TextBox 16"/>
-          <p:cNvSpPr txBox="1"/>
-          <p:nvPr/>
-        </p:nvSpPr>
-        <p:spPr>
-          <a:xfrm>
-            <a:off x="6537960" y="2468880"/>
-            <a:ext cx="5394960" cy="365760"/>
-          </a:xfrm>
-          <a:prstGeom prst="rect">
-            <a:avLst/>
-          </a:prstGeom>
-          <a:noFill/>
-        </p:spPr>
-        <p:txBody>
-          <a:bodyPr wrap="square" lIns="45720" rIns="45720" tIns="18288" bIns="18288">
-            <a:spAutoFit/>
-          </a:bodyPr>
-          <a:lstStyle/>
-          <a:p>
-            <a:pPr algn="l"/>
-            <a:r>
-              <a:rPr sz="1500" b="1">
-                <a:solidFill>
-                  <a:srgbClr val="1F6FB5"/>
-                </a:solidFill>
-                <a:latin typeface="Calibri"/>
-              </a:rPr>
-              <a:t>📊  Trend analytics</a:t>
-            </a:r>
-          </a:p>
-        </p:txBody>
-      </p:sp>
-      <p:sp>
-        <p:nvSpPr>
-          <p:cNvPr id="18" name="TextBox 17"/>
-          <p:cNvSpPr txBox="1"/>
-          <p:nvPr/>
-        </p:nvSpPr>
-        <p:spPr>
-          <a:xfrm>
-            <a:off x="6537960" y="2816352"/>
-            <a:ext cx="5394960" cy="365760"/>
-          </a:xfrm>
-          <a:prstGeom prst="rect">
-            <a:avLst/>
-          </a:prstGeom>
-          <a:noFill/>
-        </p:spPr>
-        <p:txBody>
-          <a:bodyPr wrap="square" lIns="45720" rIns="45720" tIns="18288" bIns="18288">
-            <a:spAutoFit/>
-          </a:bodyPr>
-          <a:lstStyle/>
-          <a:p>
-            <a:pPr algn="l"/>
-            <a:r>
-              <a:rPr sz="1300" b="0">
-                <a:solidFill>
-                  <a:srgbClr val="0B2A4A"/>
-                </a:solidFill>
-                <a:latin typeface="Calibri"/>
-              </a:rPr>
-              <a:t>Weekly/monthly MTTR, escape rate, top failing components</a:t>
-            </a:r>
-          </a:p>
-        </p:txBody>
-      </p:sp>
-      <p:sp>
-        <p:nvSpPr>
-          <p:cNvPr id="19" name="Rectangle 18"/>
+          <p:cNvPr id="13" name="Rectangle 12"/>
           <p:cNvSpPr/>
           <p:nvPr/>
         </p:nvSpPr>
         <p:spPr>
           <a:xfrm>
-            <a:off x="548640" y="3337560"/>
-            <a:ext cx="5623560" cy="868680"/>
+            <a:off x="5349240" y="731520"/>
+            <a:ext cx="2926080" cy="685800"/>
           </a:xfrm>
           <a:prstGeom prst="rect">
             <a:avLst/>
@@ -9398,90 +9202,20 @@
       </p:sp>
       <p:sp>
         <p:nvSpPr>
-          <p:cNvPr id="20" name="TextBox 19"/>
-          <p:cNvSpPr txBox="1"/>
-          <p:nvPr/>
-        </p:nvSpPr>
-        <p:spPr>
-          <a:xfrm>
-            <a:off x="731520" y="3429000"/>
-            <a:ext cx="5394960" cy="365760"/>
-          </a:xfrm>
-          <a:prstGeom prst="rect">
-            <a:avLst/>
-          </a:prstGeom>
-          <a:noFill/>
-        </p:spPr>
-        <p:txBody>
-          <a:bodyPr wrap="square" lIns="45720" rIns="45720" tIns="18288" bIns="18288">
-            <a:spAutoFit/>
-          </a:bodyPr>
-          <a:lstStyle/>
-          <a:p>
-            <a:pPr algn="l"/>
-            <a:r>
-              <a:rPr sz="1500" b="1">
-                <a:solidFill>
-                  <a:srgbClr val="1F6FB5"/>
-                </a:solidFill>
-                <a:latin typeface="Calibri"/>
-              </a:rPr>
-              <a:t>🔗  GitHub Issue integration</a:t>
-            </a:r>
-          </a:p>
-        </p:txBody>
-      </p:sp>
-      <p:sp>
-        <p:nvSpPr>
-          <p:cNvPr id="21" name="TextBox 20"/>
-          <p:cNvSpPr txBox="1"/>
-          <p:nvPr/>
-        </p:nvSpPr>
-        <p:spPr>
-          <a:xfrm>
-            <a:off x="731520" y="3776472"/>
-            <a:ext cx="5394960" cy="365760"/>
-          </a:xfrm>
-          <a:prstGeom prst="rect">
-            <a:avLst/>
-          </a:prstGeom>
-          <a:noFill/>
-        </p:spPr>
-        <p:txBody>
-          <a:bodyPr wrap="square" lIns="45720" rIns="45720" tIns="18288" bIns="18288">
-            <a:spAutoFit/>
-          </a:bodyPr>
-          <a:lstStyle/>
-          <a:p>
-            <a:pPr algn="l"/>
-            <a:r>
-              <a:rPr sz="1300" b="0">
-                <a:solidFill>
-                  <a:srgbClr val="0B2A4A"/>
-                </a:solidFill>
-                <a:latin typeface="Calibri"/>
-              </a:rPr>
-              <a:t>Auto-link investigations to related PRs &amp; commits</a:t>
-            </a:r>
-          </a:p>
-        </p:txBody>
-      </p:sp>
-      <p:sp>
-        <p:nvSpPr>
-          <p:cNvPr id="22" name="Rectangle 21"/>
+          <p:cNvPr id="14" name="Rectangle 13"/>
           <p:cNvSpPr/>
           <p:nvPr/>
         </p:nvSpPr>
         <p:spPr>
           <a:xfrm>
-            <a:off x="6355080" y="3337560"/>
-            <a:ext cx="5623560" cy="868680"/>
-          </a:xfrm>
-          <a:prstGeom prst="rect">
-            <a:avLst/>
-          </a:prstGeom>
-          <a:solidFill>
-            <a:srgbClr val="F2F5F9"/>
+            <a:off x="5349240" y="731520"/>
+            <a:ext cx="137160" cy="685800"/>
+          </a:xfrm>
+          <a:prstGeom prst="rect">
+            <a:avLst/>
+          </a:prstGeom>
+          <a:solidFill>
+            <a:srgbClr val="2EA04F"/>
           </a:solidFill>
           <a:ln>
             <a:noFill/>
@@ -9511,14 +9245,14 @@
       </p:sp>
       <p:sp>
         <p:nvSpPr>
-          <p:cNvPr id="23" name="TextBox 22"/>
+          <p:cNvPr id="15" name="TextBox 14"/>
           <p:cNvSpPr txBox="1"/>
           <p:nvPr/>
         </p:nvSpPr>
         <p:spPr>
           <a:xfrm>
-            <a:off x="6537960" y="3429000"/>
-            <a:ext cx="5394960" cy="365760"/>
+            <a:off x="5532120" y="768096"/>
+            <a:ext cx="2743200" cy="274320"/>
           </a:xfrm>
           <a:prstGeom prst="rect">
             <a:avLst/>
@@ -9533,27 +9267,27 @@
           <a:p>
             <a:pPr algn="l"/>
             <a:r>
-              <a:rPr sz="1500" b="1">
-                <a:solidFill>
-                  <a:srgbClr val="1F6FB5"/>
-                </a:solidFill>
-                <a:latin typeface="Calibri"/>
-              </a:rPr>
-              <a:t>🧪  Historical corpus</a:t>
-            </a:r>
-          </a:p>
-        </p:txBody>
-      </p:sp>
-      <p:sp>
-        <p:nvSpPr>
-          <p:cNvPr id="24" name="TextBox 23"/>
+              <a:rPr sz="1200" b="1">
+                <a:solidFill>
+                  <a:srgbClr val="2EA04F"/>
+                </a:solidFill>
+                <a:latin typeface="Calibri"/>
+              </a:rPr>
+              <a:t>Test / Framework Issue</a:t>
+            </a:r>
+          </a:p>
+        </p:txBody>
+      </p:sp>
+      <p:sp>
+        <p:nvSpPr>
+          <p:cNvPr id="16" name="TextBox 15"/>
           <p:cNvSpPr txBox="1"/>
           <p:nvPr/>
         </p:nvSpPr>
         <p:spPr>
           <a:xfrm>
-            <a:off x="6537960" y="3776472"/>
-            <a:ext cx="5394960" cy="365760"/>
+            <a:off x="5532120" y="1005840"/>
+            <a:ext cx="2743200" cy="365760"/>
           </a:xfrm>
           <a:prstGeom prst="rect">
             <a:avLst/>
@@ -9568,33 +9302,45 @@
           <a:p>
             <a:pPr algn="l"/>
             <a:r>
-              <a:rPr sz="1300" b="0">
+              <a:rPr sz="1100" b="0">
                 <a:solidFill>
                   <a:srgbClr val="0B2A4A"/>
                 </a:solidFill>
                 <a:latin typeface="Calibri"/>
               </a:rPr>
-              <a:t>Copilot searches past investigations before writing new</a:t>
-            </a:r>
-          </a:p>
-        </p:txBody>
-      </p:sp>
-      <p:sp>
-        <p:nvSpPr>
-          <p:cNvPr id="25" name="Rectangle 24"/>
+              <a:t>Copilot opens PR</a:t>
+            </a:r>
+          </a:p>
+          <a:p>
+            <a:pPr algn="l"/>
+            <a:r>
+              <a:rPr sz="1100" b="0">
+                <a:solidFill>
+                  <a:srgbClr val="0B2A4A"/>
+                </a:solidFill>
+                <a:latin typeface="Calibri"/>
+              </a:rPr>
+              <a:t>in automation repo</a:t>
+            </a:r>
+          </a:p>
+        </p:txBody>
+      </p:sp>
+      <p:sp>
+        <p:nvSpPr>
+          <p:cNvPr id="17" name="Right Arrow 16"/>
           <p:cNvSpPr/>
           <p:nvPr/>
         </p:nvSpPr>
         <p:spPr>
           <a:xfrm>
-            <a:off x="548640" y="4297680"/>
-            <a:ext cx="5623560" cy="868680"/>
-          </a:xfrm>
-          <a:prstGeom prst="rect">
-            <a:avLst/>
-          </a:prstGeom>
-          <a:solidFill>
-            <a:srgbClr val="F2F5F9"/>
+            <a:off x="8321040" y="914400"/>
+            <a:ext cx="365760" cy="274320"/>
+          </a:xfrm>
+          <a:prstGeom prst="rightArrow">
+            <a:avLst/>
+          </a:prstGeom>
+          <a:solidFill>
+            <a:srgbClr val="F5A623"/>
           </a:solidFill>
           <a:ln>
             <a:noFill/>
@@ -9624,90 +9370,20 @@
       </p:sp>
       <p:sp>
         <p:nvSpPr>
-          <p:cNvPr id="26" name="TextBox 25"/>
-          <p:cNvSpPr txBox="1"/>
-          <p:nvPr/>
-        </p:nvSpPr>
-        <p:spPr>
-          <a:xfrm>
-            <a:off x="731520" y="4389120"/>
-            <a:ext cx="5394960" cy="365760"/>
-          </a:xfrm>
-          <a:prstGeom prst="rect">
-            <a:avLst/>
-          </a:prstGeom>
-          <a:noFill/>
-        </p:spPr>
-        <p:txBody>
-          <a:bodyPr wrap="square" lIns="45720" rIns="45720" tIns="18288" bIns="18288">
-            <a:spAutoFit/>
-          </a:bodyPr>
-          <a:lstStyle/>
-          <a:p>
-            <a:pPr algn="l"/>
-            <a:r>
-              <a:rPr sz="1500" b="1">
-                <a:solidFill>
-                  <a:srgbClr val="1F6FB5"/>
-                </a:solidFill>
-                <a:latin typeface="Calibri"/>
-              </a:rPr>
-              <a:t>🌐  Multi-team rollout</a:t>
-            </a:r>
-          </a:p>
-        </p:txBody>
-      </p:sp>
-      <p:sp>
-        <p:nvSpPr>
-          <p:cNvPr id="27" name="TextBox 26"/>
-          <p:cNvSpPr txBox="1"/>
-          <p:nvPr/>
-        </p:nvSpPr>
-        <p:spPr>
-          <a:xfrm>
-            <a:off x="731520" y="4736592"/>
-            <a:ext cx="5394960" cy="365760"/>
-          </a:xfrm>
-          <a:prstGeom prst="rect">
-            <a:avLst/>
-          </a:prstGeom>
-          <a:noFill/>
-        </p:spPr>
-        <p:txBody>
-          <a:bodyPr wrap="square" lIns="45720" rIns="45720" tIns="18288" bIns="18288">
-            <a:spAutoFit/>
-          </a:bodyPr>
-          <a:lstStyle/>
-          <a:p>
-            <a:pPr algn="l"/>
-            <a:r>
-              <a:rPr sz="1300" b="0">
-                <a:solidFill>
-                  <a:srgbClr val="0B2A4A"/>
-                </a:solidFill>
-                <a:latin typeface="Calibri"/>
-              </a:rPr>
-              <a:t>Onboard other QA teams — same repo pattern, own folder</a:t>
-            </a:r>
-          </a:p>
-        </p:txBody>
-      </p:sp>
-      <p:sp>
-        <p:nvSpPr>
-          <p:cNvPr id="28" name="Rectangle 27"/>
+          <p:cNvPr id="18" name="Right Arrow 17"/>
           <p:cNvSpPr/>
           <p:nvPr/>
         </p:nvSpPr>
         <p:spPr>
           <a:xfrm>
-            <a:off x="6355080" y="4297680"/>
-            <a:ext cx="5623560" cy="868680"/>
-          </a:xfrm>
-          <a:prstGeom prst="rect">
-            <a:avLst/>
-          </a:prstGeom>
-          <a:solidFill>
-            <a:srgbClr val="F2F5F9"/>
+            <a:off x="4937760" y="2514600"/>
+            <a:ext cx="365760" cy="274320"/>
+          </a:xfrm>
+          <a:prstGeom prst="rightArrow">
+            <a:avLst/>
+          </a:prstGeom>
+          <a:solidFill>
+            <a:srgbClr val="F5A623"/>
           </a:solidFill>
           <a:ln>
             <a:noFill/>
@@ -9737,84 +9413,14 @@
       </p:sp>
       <p:sp>
         <p:nvSpPr>
-          <p:cNvPr id="29" name="TextBox 28"/>
-          <p:cNvSpPr txBox="1"/>
-          <p:nvPr/>
-        </p:nvSpPr>
-        <p:spPr>
-          <a:xfrm>
-            <a:off x="6537960" y="4389120"/>
-            <a:ext cx="5394960" cy="365760"/>
-          </a:xfrm>
-          <a:prstGeom prst="rect">
-            <a:avLst/>
-          </a:prstGeom>
-          <a:noFill/>
-        </p:spPr>
-        <p:txBody>
-          <a:bodyPr wrap="square" lIns="45720" rIns="45720" tIns="18288" bIns="18288">
-            <a:spAutoFit/>
-          </a:bodyPr>
-          <a:lstStyle/>
-          <a:p>
-            <a:pPr algn="l"/>
-            <a:r>
-              <a:rPr sz="1500" b="1">
-                <a:solidFill>
-                  <a:srgbClr val="1F6FB5"/>
-                </a:solidFill>
-                <a:latin typeface="Calibri"/>
-              </a:rPr>
-              <a:t>🔒  Redaction guardrails</a:t>
-            </a:r>
-          </a:p>
-        </p:txBody>
-      </p:sp>
-      <p:sp>
-        <p:nvSpPr>
-          <p:cNvPr id="30" name="TextBox 29"/>
-          <p:cNvSpPr txBox="1"/>
-          <p:nvPr/>
-        </p:nvSpPr>
-        <p:spPr>
-          <a:xfrm>
-            <a:off x="6537960" y="4736592"/>
-            <a:ext cx="5394960" cy="365760"/>
-          </a:xfrm>
-          <a:prstGeom prst="rect">
-            <a:avLst/>
-          </a:prstGeom>
-          <a:noFill/>
-        </p:spPr>
-        <p:txBody>
-          <a:bodyPr wrap="square" lIns="45720" rIns="45720" tIns="18288" bIns="18288">
-            <a:spAutoFit/>
-          </a:bodyPr>
-          <a:lstStyle/>
-          <a:p>
-            <a:pPr algn="l"/>
-            <a:r>
-              <a:rPr sz="1300" b="0">
-                <a:solidFill>
-                  <a:srgbClr val="0B2A4A"/>
-                </a:solidFill>
-                <a:latin typeface="Calibri"/>
-              </a:rPr>
-              <a:t>Automatic PII/secret scrubbing before writing reports</a:t>
-            </a:r>
-          </a:p>
-        </p:txBody>
-      </p:sp>
-      <p:sp>
-        <p:nvSpPr>
-          <p:cNvPr id="31" name="Rectangle 30"/>
+          <p:cNvPr id="19" name="Rectangle 18"/>
           <p:cNvSpPr/>
           <p:nvPr/>
         </p:nvSpPr>
         <p:spPr>
           <a:xfrm>
-            <a:off x="548640" y="5257800"/>
-            <a:ext cx="5623560" cy="868680"/>
+            <a:off x="5349240" y="2377440"/>
+            <a:ext cx="2926080" cy="685800"/>
           </a:xfrm>
           <a:prstGeom prst="rect">
             <a:avLst/>
@@ -9850,90 +9456,20 @@
       </p:sp>
       <p:sp>
         <p:nvSpPr>
-          <p:cNvPr id="32" name="TextBox 31"/>
-          <p:cNvSpPr txBox="1"/>
-          <p:nvPr/>
-        </p:nvSpPr>
-        <p:spPr>
-          <a:xfrm>
-            <a:off x="731520" y="5349240"/>
-            <a:ext cx="5394960" cy="365760"/>
-          </a:xfrm>
-          <a:prstGeom prst="rect">
-            <a:avLst/>
-          </a:prstGeom>
-          <a:noFill/>
-        </p:spPr>
-        <p:txBody>
-          <a:bodyPr wrap="square" lIns="45720" rIns="45720" tIns="18288" bIns="18288">
-            <a:spAutoFit/>
-          </a:bodyPr>
-          <a:lstStyle/>
-          <a:p>
-            <a:pPr algn="l"/>
-            <a:r>
-              <a:rPr sz="1500" b="1">
-                <a:solidFill>
-                  <a:srgbClr val="1F6FB5"/>
-                </a:solidFill>
-                <a:latin typeface="Calibri"/>
-              </a:rPr>
-              <a:t>🧭  SLA tracking</a:t>
-            </a:r>
-          </a:p>
-        </p:txBody>
-      </p:sp>
-      <p:sp>
-        <p:nvSpPr>
-          <p:cNvPr id="33" name="TextBox 32"/>
-          <p:cNvSpPr txBox="1"/>
-          <p:nvPr/>
-        </p:nvSpPr>
-        <p:spPr>
-          <a:xfrm>
-            <a:off x="731520" y="5696712"/>
-            <a:ext cx="5394960" cy="365760"/>
-          </a:xfrm>
-          <a:prstGeom prst="rect">
-            <a:avLst/>
-          </a:prstGeom>
-          <a:noFill/>
-        </p:spPr>
-        <p:txBody>
-          <a:bodyPr wrap="square" lIns="45720" rIns="45720" tIns="18288" bIns="18288">
-            <a:spAutoFit/>
-          </a:bodyPr>
-          <a:lstStyle/>
-          <a:p>
-            <a:pPr algn="l"/>
-            <a:r>
-              <a:rPr sz="1300" b="0">
-                <a:solidFill>
-                  <a:srgbClr val="0B2A4A"/>
-                </a:solidFill>
-                <a:latin typeface="Calibri"/>
-              </a:rPr>
-              <a:t>Age of open regressions vs. severity</a:t>
-            </a:r>
-          </a:p>
-        </p:txBody>
-      </p:sp>
-      <p:sp>
-        <p:nvSpPr>
-          <p:cNvPr id="34" name="Rectangle 33"/>
+          <p:cNvPr id="20" name="Rectangle 19"/>
           <p:cNvSpPr/>
           <p:nvPr/>
         </p:nvSpPr>
         <p:spPr>
           <a:xfrm>
-            <a:off x="6355080" y="5257800"/>
-            <a:ext cx="5623560" cy="868680"/>
-          </a:xfrm>
-          <a:prstGeom prst="rect">
-            <a:avLst/>
-          </a:prstGeom>
-          <a:solidFill>
-            <a:srgbClr val="F2F5F9"/>
+            <a:off x="5349240" y="2377440"/>
+            <a:ext cx="137160" cy="685800"/>
+          </a:xfrm>
+          <a:prstGeom prst="rect">
+            <a:avLst/>
+          </a:prstGeom>
+          <a:solidFill>
+            <a:srgbClr val="F5A623"/>
           </a:solidFill>
           <a:ln>
             <a:noFill/>
@@ -9963,14 +9499,14 @@
       </p:sp>
       <p:sp>
         <p:nvSpPr>
-          <p:cNvPr id="35" name="TextBox 34"/>
+          <p:cNvPr id="21" name="TextBox 20"/>
           <p:cNvSpPr txBox="1"/>
           <p:nvPr/>
         </p:nvSpPr>
         <p:spPr>
           <a:xfrm>
-            <a:off x="6537960" y="5349240"/>
-            <a:ext cx="5394960" cy="365760"/>
+            <a:off x="5532120" y="2414016"/>
+            <a:ext cx="2743200" cy="274320"/>
           </a:xfrm>
           <a:prstGeom prst="rect">
             <a:avLst/>
@@ -9985,27 +9521,27 @@
           <a:p>
             <a:pPr algn="l"/>
             <a:r>
-              <a:rPr sz="1500" b="1">
-                <a:solidFill>
-                  <a:srgbClr val="1F6FB5"/>
-                </a:solidFill>
-                <a:latin typeface="Calibri"/>
-              </a:rPr>
-              <a:t>🗣️  Voice / chat interface</a:t>
-            </a:r>
-          </a:p>
-        </p:txBody>
-      </p:sp>
-      <p:sp>
-        <p:nvSpPr>
-          <p:cNvPr id="36" name="TextBox 35"/>
+              <a:rPr sz="1200" b="1">
+                <a:solidFill>
+                  <a:srgbClr val="F5A623"/>
+                </a:solidFill>
+                <a:latin typeface="Calibri"/>
+              </a:rPr>
+              <a:t>Environment / Data</a:t>
+            </a:r>
+          </a:p>
+        </p:txBody>
+      </p:sp>
+      <p:sp>
+        <p:nvSpPr>
+          <p:cNvPr id="22" name="TextBox 21"/>
           <p:cNvSpPr txBox="1"/>
           <p:nvPr/>
         </p:nvSpPr>
         <p:spPr>
           <a:xfrm>
-            <a:off x="6537960" y="5696712"/>
-            <a:ext cx="5394960" cy="365760"/>
+            <a:off x="5532120" y="2651760"/>
+            <a:ext cx="2743200" cy="365760"/>
           </a:xfrm>
           <a:prstGeom prst="rect">
             <a:avLst/>
@@ -10020,33 +9556,45 @@
           <a:p>
             <a:pPr algn="l"/>
             <a:r>
-              <a:rPr sz="1300" b="0">
+              <a:rPr sz="1100" b="0">
                 <a:solidFill>
                   <a:srgbClr val="0B2A4A"/>
                 </a:solidFill>
                 <a:latin typeface="Calibri"/>
               </a:rPr>
-              <a:t>‘Why is build 401 failing?’ → conversational answer</a:t>
-            </a:r>
-          </a:p>
-        </p:txBody>
-      </p:sp>
-      <p:sp>
-        <p:nvSpPr>
-          <p:cNvPr id="37" name="Rectangle 36"/>
+              <a:t>Copilot pings DevOps</a:t>
+            </a:r>
+          </a:p>
+          <a:p>
+            <a:pPr algn="l"/>
+            <a:r>
+              <a:rPr sz="1100" b="0">
+                <a:solidFill>
+                  <a:srgbClr val="0B2A4A"/>
+                </a:solidFill>
+                <a:latin typeface="Calibri"/>
+              </a:rPr>
+              <a:t>+ opens infra ticket</a:t>
+            </a:r>
+          </a:p>
+        </p:txBody>
+      </p:sp>
+      <p:sp>
+        <p:nvSpPr>
+          <p:cNvPr id="23" name="Right Arrow 22"/>
           <p:cNvSpPr/>
           <p:nvPr/>
         </p:nvSpPr>
         <p:spPr>
           <a:xfrm>
-            <a:off x="0" y="6583680"/>
-            <a:ext cx="12191695" cy="274320"/>
-          </a:xfrm>
-          <a:prstGeom prst="rect">
-            <a:avLst/>
-          </a:prstGeom>
-          <a:solidFill>
-            <a:srgbClr val="F2F5F9"/>
+            <a:off x="8321040" y="2560320"/>
+            <a:ext cx="365760" cy="274320"/>
+          </a:xfrm>
+          <a:prstGeom prst="rightArrow">
+            <a:avLst/>
+          </a:prstGeom>
+          <a:solidFill>
+            <a:srgbClr val="F5A623"/>
           </a:solidFill>
           <a:ln>
             <a:noFill/>
@@ -10076,14 +9624,143 @@
       </p:sp>
       <p:sp>
         <p:nvSpPr>
-          <p:cNvPr id="38" name="TextBox 37"/>
+          <p:cNvPr id="24" name="Right Arrow 23"/>
+          <p:cNvSpPr/>
+          <p:nvPr/>
+        </p:nvSpPr>
+        <p:spPr>
+          <a:xfrm>
+            <a:off x="4937760" y="4160520"/>
+            <a:ext cx="365760" cy="274320"/>
+          </a:xfrm>
+          <a:prstGeom prst="rightArrow">
+            <a:avLst/>
+          </a:prstGeom>
+          <a:solidFill>
+            <a:srgbClr val="F5A623"/>
+          </a:solidFill>
+          <a:ln>
+            <a:noFill/>
+          </a:ln>
+        </p:spPr>
+        <p:style>
+          <a:lnRef idx="1">
+            <a:schemeClr val="accent1"/>
+          </a:lnRef>
+          <a:fillRef idx="3">
+            <a:schemeClr val="accent1"/>
+          </a:fillRef>
+          <a:effectRef idx="2">
+            <a:schemeClr val="accent1"/>
+          </a:effectRef>
+          <a:fontRef idx="minor">
+            <a:schemeClr val="lt1"/>
+          </a:fontRef>
+        </p:style>
+        <p:txBody>
+          <a:bodyPr rtlCol="0" anchor="ctr"/>
+          <a:lstStyle/>
+          <a:p>
+            <a:pPr algn="ctr"/>
+          </a:p>
+        </p:txBody>
+      </p:sp>
+      <p:sp>
+        <p:nvSpPr>
+          <p:cNvPr id="25" name="Rectangle 24"/>
+          <p:cNvSpPr/>
+          <p:nvPr/>
+        </p:nvSpPr>
+        <p:spPr>
+          <a:xfrm>
+            <a:off x="5349240" y="4023360"/>
+            <a:ext cx="2926080" cy="685800"/>
+          </a:xfrm>
+          <a:prstGeom prst="rect">
+            <a:avLst/>
+          </a:prstGeom>
+          <a:solidFill>
+            <a:srgbClr val="F2F5F9"/>
+          </a:solidFill>
+          <a:ln>
+            <a:noFill/>
+          </a:ln>
+        </p:spPr>
+        <p:style>
+          <a:lnRef idx="1">
+            <a:schemeClr val="accent1"/>
+          </a:lnRef>
+          <a:fillRef idx="3">
+            <a:schemeClr val="accent1"/>
+          </a:fillRef>
+          <a:effectRef idx="2">
+            <a:schemeClr val="accent1"/>
+          </a:effectRef>
+          <a:fontRef idx="minor">
+            <a:schemeClr val="lt1"/>
+          </a:fontRef>
+        </p:style>
+        <p:txBody>
+          <a:bodyPr rtlCol="0" anchor="ctr"/>
+          <a:lstStyle/>
+          <a:p>
+            <a:pPr algn="ctr"/>
+          </a:p>
+        </p:txBody>
+      </p:sp>
+      <p:sp>
+        <p:nvSpPr>
+          <p:cNvPr id="26" name="Rectangle 25"/>
+          <p:cNvSpPr/>
+          <p:nvPr/>
+        </p:nvSpPr>
+        <p:spPr>
+          <a:xfrm>
+            <a:off x="5349240" y="4023360"/>
+            <a:ext cx="137160" cy="685800"/>
+          </a:xfrm>
+          <a:prstGeom prst="rect">
+            <a:avLst/>
+          </a:prstGeom>
+          <a:solidFill>
+            <a:srgbClr val="1F6FB5"/>
+          </a:solidFill>
+          <a:ln>
+            <a:noFill/>
+          </a:ln>
+        </p:spPr>
+        <p:style>
+          <a:lnRef idx="1">
+            <a:schemeClr val="accent1"/>
+          </a:lnRef>
+          <a:fillRef idx="3">
+            <a:schemeClr val="accent1"/>
+          </a:fillRef>
+          <a:effectRef idx="2">
+            <a:schemeClr val="accent1"/>
+          </a:effectRef>
+          <a:fontRef idx="minor">
+            <a:schemeClr val="lt1"/>
+          </a:fontRef>
+        </p:style>
+        <p:txBody>
+          <a:bodyPr rtlCol="0" anchor="ctr"/>
+          <a:lstStyle/>
+          <a:p>
+            <a:pPr algn="ctr"/>
+          </a:p>
+        </p:txBody>
+      </p:sp>
+      <p:sp>
+        <p:nvSpPr>
+          <p:cNvPr id="27" name="TextBox 26"/>
           <p:cNvSpPr txBox="1"/>
           <p:nvPr/>
         </p:nvSpPr>
         <p:spPr>
           <a:xfrm>
-            <a:off x="457200" y="6601968"/>
-            <a:ext cx="9144000" cy="256032"/>
+            <a:off x="5532120" y="4059936"/>
+            <a:ext cx="2743200" cy="274320"/>
           </a:xfrm>
           <a:prstGeom prst="rect">
             <a:avLst/>
@@ -10098,6 +9775,775 @@
           <a:p>
             <a:pPr algn="l"/>
             <a:r>
+              <a:rPr sz="1200" b="1">
+                <a:solidFill>
+                  <a:srgbClr val="1F6FB5"/>
+                </a:solidFill>
+                <a:latin typeface="Calibri"/>
+              </a:rPr>
+              <a:t>Real Product Bug</a:t>
+            </a:r>
+          </a:p>
+        </p:txBody>
+      </p:sp>
+      <p:sp>
+        <p:nvSpPr>
+          <p:cNvPr id="28" name="TextBox 27"/>
+          <p:cNvSpPr txBox="1"/>
+          <p:nvPr/>
+        </p:nvSpPr>
+        <p:spPr>
+          <a:xfrm>
+            <a:off x="5532120" y="4297680"/>
+            <a:ext cx="2743200" cy="365760"/>
+          </a:xfrm>
+          <a:prstGeom prst="rect">
+            <a:avLst/>
+          </a:prstGeom>
+          <a:noFill/>
+        </p:spPr>
+        <p:txBody>
+          <a:bodyPr wrap="square" lIns="45720" rIns="45720" tIns="18288" bIns="18288">
+            <a:spAutoFit/>
+          </a:bodyPr>
+          <a:lstStyle/>
+          <a:p>
+            <a:pPr algn="l"/>
+            <a:r>
+              <a:rPr sz="1100" b="0">
+                <a:solidFill>
+                  <a:srgbClr val="0B2A4A"/>
+                </a:solidFill>
+                <a:latin typeface="Calibri"/>
+              </a:rPr>
+              <a:t>Copilot creates Jira</a:t>
+            </a:r>
+          </a:p>
+          <a:p>
+            <a:pPr algn="l"/>
+            <a:r>
+              <a:rPr sz="1100" b="0">
+                <a:solidFill>
+                  <a:srgbClr val="0B2A4A"/>
+                </a:solidFill>
+                <a:latin typeface="Calibri"/>
+              </a:rPr>
+              <a:t>via Jira MCP</a:t>
+            </a:r>
+          </a:p>
+        </p:txBody>
+      </p:sp>
+      <p:sp>
+        <p:nvSpPr>
+          <p:cNvPr id="29" name="Right Arrow 28"/>
+          <p:cNvSpPr/>
+          <p:nvPr/>
+        </p:nvSpPr>
+        <p:spPr>
+          <a:xfrm>
+            <a:off x="8321040" y="4206240"/>
+            <a:ext cx="365760" cy="274320"/>
+          </a:xfrm>
+          <a:prstGeom prst="rightArrow">
+            <a:avLst/>
+          </a:prstGeom>
+          <a:solidFill>
+            <a:srgbClr val="F5A623"/>
+          </a:solidFill>
+          <a:ln>
+            <a:noFill/>
+          </a:ln>
+        </p:spPr>
+        <p:style>
+          <a:lnRef idx="1">
+            <a:schemeClr val="accent1"/>
+          </a:lnRef>
+          <a:fillRef idx="3">
+            <a:schemeClr val="accent1"/>
+          </a:fillRef>
+          <a:effectRef idx="2">
+            <a:schemeClr val="accent1"/>
+          </a:effectRef>
+          <a:fontRef idx="minor">
+            <a:schemeClr val="lt1"/>
+          </a:fontRef>
+        </p:style>
+        <p:txBody>
+          <a:bodyPr rtlCol="0" anchor="ctr"/>
+          <a:lstStyle/>
+          <a:p>
+            <a:pPr algn="ctr"/>
+          </a:p>
+        </p:txBody>
+      </p:sp>
+      <p:sp>
+        <p:nvSpPr>
+          <p:cNvPr id="30" name="Right Arrow 29"/>
+          <p:cNvSpPr/>
+          <p:nvPr/>
+        </p:nvSpPr>
+        <p:spPr>
+          <a:xfrm>
+            <a:off x="4937760" y="5806440"/>
+            <a:ext cx="365760" cy="274320"/>
+          </a:xfrm>
+          <a:prstGeom prst="rightArrow">
+            <a:avLst/>
+          </a:prstGeom>
+          <a:solidFill>
+            <a:srgbClr val="F5A623"/>
+          </a:solidFill>
+          <a:ln>
+            <a:noFill/>
+          </a:ln>
+        </p:spPr>
+        <p:style>
+          <a:lnRef idx="1">
+            <a:schemeClr val="accent1"/>
+          </a:lnRef>
+          <a:fillRef idx="3">
+            <a:schemeClr val="accent1"/>
+          </a:fillRef>
+          <a:effectRef idx="2">
+            <a:schemeClr val="accent1"/>
+          </a:effectRef>
+          <a:fontRef idx="minor">
+            <a:schemeClr val="lt1"/>
+          </a:fontRef>
+        </p:style>
+        <p:txBody>
+          <a:bodyPr rtlCol="0" anchor="ctr"/>
+          <a:lstStyle/>
+          <a:p>
+            <a:pPr algn="ctr"/>
+          </a:p>
+        </p:txBody>
+      </p:sp>
+      <p:sp>
+        <p:nvSpPr>
+          <p:cNvPr id="31" name="Rectangle 30"/>
+          <p:cNvSpPr/>
+          <p:nvPr/>
+        </p:nvSpPr>
+        <p:spPr>
+          <a:xfrm>
+            <a:off x="5349240" y="5669280"/>
+            <a:ext cx="2926080" cy="685800"/>
+          </a:xfrm>
+          <a:prstGeom prst="rect">
+            <a:avLst/>
+          </a:prstGeom>
+          <a:solidFill>
+            <a:srgbClr val="F2F5F9"/>
+          </a:solidFill>
+          <a:ln>
+            <a:noFill/>
+          </a:ln>
+        </p:spPr>
+        <p:style>
+          <a:lnRef idx="1">
+            <a:schemeClr val="accent1"/>
+          </a:lnRef>
+          <a:fillRef idx="3">
+            <a:schemeClr val="accent1"/>
+          </a:fillRef>
+          <a:effectRef idx="2">
+            <a:schemeClr val="accent1"/>
+          </a:effectRef>
+          <a:fontRef idx="minor">
+            <a:schemeClr val="lt1"/>
+          </a:fontRef>
+        </p:style>
+        <p:txBody>
+          <a:bodyPr rtlCol="0" anchor="ctr"/>
+          <a:lstStyle/>
+          <a:p>
+            <a:pPr algn="ctr"/>
+          </a:p>
+        </p:txBody>
+      </p:sp>
+      <p:sp>
+        <p:nvSpPr>
+          <p:cNvPr id="32" name="Rectangle 31"/>
+          <p:cNvSpPr/>
+          <p:nvPr/>
+        </p:nvSpPr>
+        <p:spPr>
+          <a:xfrm>
+            <a:off x="5349240" y="5669280"/>
+            <a:ext cx="137160" cy="685800"/>
+          </a:xfrm>
+          <a:prstGeom prst="rect">
+            <a:avLst/>
+          </a:prstGeom>
+          <a:solidFill>
+            <a:srgbClr val="0F8B8D"/>
+          </a:solidFill>
+          <a:ln>
+            <a:noFill/>
+          </a:ln>
+        </p:spPr>
+        <p:style>
+          <a:lnRef idx="1">
+            <a:schemeClr val="accent1"/>
+          </a:lnRef>
+          <a:fillRef idx="3">
+            <a:schemeClr val="accent1"/>
+          </a:fillRef>
+          <a:effectRef idx="2">
+            <a:schemeClr val="accent1"/>
+          </a:effectRef>
+          <a:fontRef idx="minor">
+            <a:schemeClr val="lt1"/>
+          </a:fontRef>
+        </p:style>
+        <p:txBody>
+          <a:bodyPr rtlCol="0" anchor="ctr"/>
+          <a:lstStyle/>
+          <a:p>
+            <a:pPr algn="ctr"/>
+          </a:p>
+        </p:txBody>
+      </p:sp>
+      <p:sp>
+        <p:nvSpPr>
+          <p:cNvPr id="33" name="TextBox 32"/>
+          <p:cNvSpPr txBox="1"/>
+          <p:nvPr/>
+        </p:nvSpPr>
+        <p:spPr>
+          <a:xfrm>
+            <a:off x="5532120" y="5705856"/>
+            <a:ext cx="2743200" cy="274320"/>
+          </a:xfrm>
+          <a:prstGeom prst="rect">
+            <a:avLst/>
+          </a:prstGeom>
+          <a:noFill/>
+        </p:spPr>
+        <p:txBody>
+          <a:bodyPr wrap="square" lIns="45720" rIns="45720" tIns="18288" bIns="18288">
+            <a:spAutoFit/>
+          </a:bodyPr>
+          <a:lstStyle/>
+          <a:p>
+            <a:pPr algn="l"/>
+            <a:r>
+              <a:rPr sz="1200" b="1">
+                <a:solidFill>
+                  <a:srgbClr val="0F8B8D"/>
+                </a:solidFill>
+                <a:latin typeface="Calibri"/>
+              </a:rPr>
+              <a:t>Test Coverage Update</a:t>
+            </a:r>
+          </a:p>
+        </p:txBody>
+      </p:sp>
+      <p:sp>
+        <p:nvSpPr>
+          <p:cNvPr id="34" name="TextBox 33"/>
+          <p:cNvSpPr txBox="1"/>
+          <p:nvPr/>
+        </p:nvSpPr>
+        <p:spPr>
+          <a:xfrm>
+            <a:off x="5532120" y="5943600"/>
+            <a:ext cx="2743200" cy="365760"/>
+          </a:xfrm>
+          <a:prstGeom prst="rect">
+            <a:avLst/>
+          </a:prstGeom>
+          <a:noFill/>
+        </p:spPr>
+        <p:txBody>
+          <a:bodyPr wrap="square" lIns="45720" rIns="45720" tIns="18288" bIns="18288">
+            <a:spAutoFit/>
+          </a:bodyPr>
+          <a:lstStyle/>
+          <a:p>
+            <a:pPr algn="l"/>
+            <a:r>
+              <a:rPr sz="1100" b="0">
+                <a:solidFill>
+                  <a:srgbClr val="0B2A4A"/>
+                </a:solidFill>
+                <a:latin typeface="Calibri"/>
+              </a:rPr>
+              <a:t>Copilot syncs results</a:t>
+            </a:r>
+          </a:p>
+          <a:p>
+            <a:pPr algn="l"/>
+            <a:r>
+              <a:rPr sz="1100" b="0">
+                <a:solidFill>
+                  <a:srgbClr val="0B2A4A"/>
+                </a:solidFill>
+                <a:latin typeface="Calibri"/>
+              </a:rPr>
+              <a:t>to Jira Test Mgmt</a:t>
+            </a:r>
+          </a:p>
+        </p:txBody>
+      </p:sp>
+      <p:sp>
+        <p:nvSpPr>
+          <p:cNvPr id="35" name="Right Arrow 34"/>
+          <p:cNvSpPr/>
+          <p:nvPr/>
+        </p:nvSpPr>
+        <p:spPr>
+          <a:xfrm>
+            <a:off x="8321040" y="5852160"/>
+            <a:ext cx="365760" cy="274320"/>
+          </a:xfrm>
+          <a:prstGeom prst="rightArrow">
+            <a:avLst/>
+          </a:prstGeom>
+          <a:solidFill>
+            <a:srgbClr val="F5A623"/>
+          </a:solidFill>
+          <a:ln>
+            <a:noFill/>
+          </a:ln>
+        </p:spPr>
+        <p:style>
+          <a:lnRef idx="1">
+            <a:schemeClr val="accent1"/>
+          </a:lnRef>
+          <a:fillRef idx="3">
+            <a:schemeClr val="accent1"/>
+          </a:fillRef>
+          <a:effectRef idx="2">
+            <a:schemeClr val="accent1"/>
+          </a:effectRef>
+          <a:fontRef idx="minor">
+            <a:schemeClr val="lt1"/>
+          </a:fontRef>
+        </p:style>
+        <p:txBody>
+          <a:bodyPr rtlCol="0" anchor="ctr"/>
+          <a:lstStyle/>
+          <a:p>
+            <a:pPr algn="ctr"/>
+          </a:p>
+        </p:txBody>
+      </p:sp>
+      <p:sp>
+        <p:nvSpPr>
+          <p:cNvPr id="36" name="Rectangle 35"/>
+          <p:cNvSpPr/>
+          <p:nvPr/>
+        </p:nvSpPr>
+        <p:spPr>
+          <a:xfrm>
+            <a:off x="8732520" y="731520"/>
+            <a:ext cx="2926080" cy="685800"/>
+          </a:xfrm>
+          <a:prstGeom prst="rect">
+            <a:avLst/>
+          </a:prstGeom>
+          <a:solidFill>
+            <a:srgbClr val="2EA04F"/>
+          </a:solidFill>
+          <a:ln>
+            <a:noFill/>
+          </a:ln>
+        </p:spPr>
+        <p:style>
+          <a:lnRef idx="1">
+            <a:schemeClr val="accent1"/>
+          </a:lnRef>
+          <a:fillRef idx="3">
+            <a:schemeClr val="accent1"/>
+          </a:fillRef>
+          <a:effectRef idx="2">
+            <a:schemeClr val="accent1"/>
+          </a:effectRef>
+          <a:fontRef idx="minor">
+            <a:schemeClr val="lt1"/>
+          </a:fontRef>
+        </p:style>
+        <p:txBody>
+          <a:bodyPr rtlCol="0" anchor="ctr"/>
+          <a:lstStyle/>
+          <a:p>
+            <a:pPr algn="ctr"/>
+          </a:p>
+        </p:txBody>
+      </p:sp>
+      <p:sp>
+        <p:nvSpPr>
+          <p:cNvPr id="37" name="TextBox 36"/>
+          <p:cNvSpPr txBox="1"/>
+          <p:nvPr/>
+        </p:nvSpPr>
+        <p:spPr>
+          <a:xfrm>
+            <a:off x="8732520" y="896112"/>
+            <a:ext cx="2926080" cy="365760"/>
+          </a:xfrm>
+          <a:prstGeom prst="rect">
+            <a:avLst/>
+          </a:prstGeom>
+          <a:noFill/>
+        </p:spPr>
+        <p:txBody>
+          <a:bodyPr wrap="square" lIns="45720" rIns="45720" tIns="18288" bIns="18288">
+            <a:spAutoFit/>
+          </a:bodyPr>
+          <a:lstStyle/>
+          <a:p>
+            <a:pPr algn="ctr"/>
+            <a:r>
+              <a:rPr sz="1400" b="1">
+                <a:solidFill>
+                  <a:srgbClr val="FFFFFF"/>
+                </a:solidFill>
+                <a:latin typeface="Calibri"/>
+              </a:rPr>
+              <a:t>PR opened</a:t>
+            </a:r>
+          </a:p>
+        </p:txBody>
+      </p:sp>
+      <p:sp>
+        <p:nvSpPr>
+          <p:cNvPr id="38" name="Rectangle 37"/>
+          <p:cNvSpPr/>
+          <p:nvPr/>
+        </p:nvSpPr>
+        <p:spPr>
+          <a:xfrm>
+            <a:off x="8732520" y="2377440"/>
+            <a:ext cx="2926080" cy="685800"/>
+          </a:xfrm>
+          <a:prstGeom prst="rect">
+            <a:avLst/>
+          </a:prstGeom>
+          <a:solidFill>
+            <a:srgbClr val="F5A623"/>
+          </a:solidFill>
+          <a:ln>
+            <a:noFill/>
+          </a:ln>
+        </p:spPr>
+        <p:style>
+          <a:lnRef idx="1">
+            <a:schemeClr val="accent1"/>
+          </a:lnRef>
+          <a:fillRef idx="3">
+            <a:schemeClr val="accent1"/>
+          </a:fillRef>
+          <a:effectRef idx="2">
+            <a:schemeClr val="accent1"/>
+          </a:effectRef>
+          <a:fontRef idx="minor">
+            <a:schemeClr val="lt1"/>
+          </a:fontRef>
+        </p:style>
+        <p:txBody>
+          <a:bodyPr rtlCol="0" anchor="ctr"/>
+          <a:lstStyle/>
+          <a:p>
+            <a:pPr algn="ctr"/>
+          </a:p>
+        </p:txBody>
+      </p:sp>
+      <p:sp>
+        <p:nvSpPr>
+          <p:cNvPr id="39" name="TextBox 38"/>
+          <p:cNvSpPr txBox="1"/>
+          <p:nvPr/>
+        </p:nvSpPr>
+        <p:spPr>
+          <a:xfrm>
+            <a:off x="8732520" y="2542032"/>
+            <a:ext cx="2926080" cy="365760"/>
+          </a:xfrm>
+          <a:prstGeom prst="rect">
+            <a:avLst/>
+          </a:prstGeom>
+          <a:noFill/>
+        </p:spPr>
+        <p:txBody>
+          <a:bodyPr wrap="square" lIns="45720" rIns="45720" tIns="18288" bIns="18288">
+            <a:spAutoFit/>
+          </a:bodyPr>
+          <a:lstStyle/>
+          <a:p>
+            <a:pPr algn="ctr"/>
+            <a:r>
+              <a:rPr sz="1400" b="1">
+                <a:solidFill>
+                  <a:srgbClr val="FFFFFF"/>
+                </a:solidFill>
+                <a:latin typeface="Calibri"/>
+              </a:rPr>
+              <a:t>Env fixed</a:t>
+            </a:r>
+          </a:p>
+        </p:txBody>
+      </p:sp>
+      <p:sp>
+        <p:nvSpPr>
+          <p:cNvPr id="40" name="Rectangle 39"/>
+          <p:cNvSpPr/>
+          <p:nvPr/>
+        </p:nvSpPr>
+        <p:spPr>
+          <a:xfrm>
+            <a:off x="8732520" y="4023360"/>
+            <a:ext cx="2926080" cy="685800"/>
+          </a:xfrm>
+          <a:prstGeom prst="rect">
+            <a:avLst/>
+          </a:prstGeom>
+          <a:solidFill>
+            <a:srgbClr val="1F6FB5"/>
+          </a:solidFill>
+          <a:ln>
+            <a:noFill/>
+          </a:ln>
+        </p:spPr>
+        <p:style>
+          <a:lnRef idx="1">
+            <a:schemeClr val="accent1"/>
+          </a:lnRef>
+          <a:fillRef idx="3">
+            <a:schemeClr val="accent1"/>
+          </a:fillRef>
+          <a:effectRef idx="2">
+            <a:schemeClr val="accent1"/>
+          </a:effectRef>
+          <a:fontRef idx="minor">
+            <a:schemeClr val="lt1"/>
+          </a:fontRef>
+        </p:style>
+        <p:txBody>
+          <a:bodyPr rtlCol="0" anchor="ctr"/>
+          <a:lstStyle/>
+          <a:p>
+            <a:pPr algn="ctr"/>
+          </a:p>
+        </p:txBody>
+      </p:sp>
+      <p:sp>
+        <p:nvSpPr>
+          <p:cNvPr id="41" name="TextBox 40"/>
+          <p:cNvSpPr txBox="1"/>
+          <p:nvPr/>
+        </p:nvSpPr>
+        <p:spPr>
+          <a:xfrm>
+            <a:off x="8732520" y="4187952"/>
+            <a:ext cx="2926080" cy="365760"/>
+          </a:xfrm>
+          <a:prstGeom prst="rect">
+            <a:avLst/>
+          </a:prstGeom>
+          <a:noFill/>
+        </p:spPr>
+        <p:txBody>
+          <a:bodyPr wrap="square" lIns="45720" rIns="45720" tIns="18288" bIns="18288">
+            <a:spAutoFit/>
+          </a:bodyPr>
+          <a:lstStyle/>
+          <a:p>
+            <a:pPr algn="ctr"/>
+            <a:r>
+              <a:rPr sz="1400" b="1">
+                <a:solidFill>
+                  <a:srgbClr val="FFFFFF"/>
+                </a:solidFill>
+                <a:latin typeface="Calibri"/>
+              </a:rPr>
+              <a:t>Jira raised</a:t>
+            </a:r>
+          </a:p>
+        </p:txBody>
+      </p:sp>
+      <p:sp>
+        <p:nvSpPr>
+          <p:cNvPr id="42" name="Rectangle 41"/>
+          <p:cNvSpPr/>
+          <p:nvPr/>
+        </p:nvSpPr>
+        <p:spPr>
+          <a:xfrm>
+            <a:off x="8732520" y="5669280"/>
+            <a:ext cx="2926080" cy="685800"/>
+          </a:xfrm>
+          <a:prstGeom prst="rect">
+            <a:avLst/>
+          </a:prstGeom>
+          <a:solidFill>
+            <a:srgbClr val="0F8B8D"/>
+          </a:solidFill>
+          <a:ln>
+            <a:noFill/>
+          </a:ln>
+        </p:spPr>
+        <p:style>
+          <a:lnRef idx="1">
+            <a:schemeClr val="accent1"/>
+          </a:lnRef>
+          <a:fillRef idx="3">
+            <a:schemeClr val="accent1"/>
+          </a:fillRef>
+          <a:effectRef idx="2">
+            <a:schemeClr val="accent1"/>
+          </a:effectRef>
+          <a:fontRef idx="minor">
+            <a:schemeClr val="lt1"/>
+          </a:fontRef>
+        </p:style>
+        <p:txBody>
+          <a:bodyPr rtlCol="0" anchor="ctr"/>
+          <a:lstStyle/>
+          <a:p>
+            <a:pPr algn="ctr"/>
+          </a:p>
+        </p:txBody>
+      </p:sp>
+      <p:sp>
+        <p:nvSpPr>
+          <p:cNvPr id="43" name="TextBox 42"/>
+          <p:cNvSpPr txBox="1"/>
+          <p:nvPr/>
+        </p:nvSpPr>
+        <p:spPr>
+          <a:xfrm>
+            <a:off x="8732520" y="5833872"/>
+            <a:ext cx="2926080" cy="365760"/>
+          </a:xfrm>
+          <a:prstGeom prst="rect">
+            <a:avLst/>
+          </a:prstGeom>
+          <a:noFill/>
+        </p:spPr>
+        <p:txBody>
+          <a:bodyPr wrap="square" lIns="45720" rIns="45720" tIns="18288" bIns="18288">
+            <a:spAutoFit/>
+          </a:bodyPr>
+          <a:lstStyle/>
+          <a:p>
+            <a:pPr algn="ctr"/>
+            <a:r>
+              <a:rPr sz="1400" b="1">
+                <a:solidFill>
+                  <a:srgbClr val="FFFFFF"/>
+                </a:solidFill>
+                <a:latin typeface="Calibri"/>
+              </a:rPr>
+              <a:t>Xray updated</a:t>
+            </a:r>
+          </a:p>
+        </p:txBody>
+      </p:sp>
+      <p:sp>
+        <p:nvSpPr>
+          <p:cNvPr id="44" name="TextBox 43"/>
+          <p:cNvSpPr txBox="1"/>
+          <p:nvPr/>
+        </p:nvSpPr>
+        <p:spPr>
+          <a:xfrm>
+            <a:off x="457200" y="6446520"/>
+            <a:ext cx="10972800" cy="137160"/>
+          </a:xfrm>
+          <a:prstGeom prst="rect">
+            <a:avLst/>
+          </a:prstGeom>
+          <a:noFill/>
+        </p:spPr>
+        <p:txBody>
+          <a:bodyPr wrap="square" lIns="45720" rIns="45720" tIns="18288" bIns="18288">
+            <a:spAutoFit/>
+          </a:bodyPr>
+          <a:lstStyle/>
+          <a:p>
+            <a:pPr algn="ctr"/>
+            <a:r>
+              <a:rPr sz="1300" b="1">
+                <a:solidFill>
+                  <a:srgbClr val="555C66"/>
+                </a:solidFill>
+                <a:latin typeface="Calibri"/>
+              </a:rPr>
+              <a:t>Humans review the PR / ticket — Copilot never merges directly.</a:t>
+            </a:r>
+          </a:p>
+        </p:txBody>
+      </p:sp>
+      <p:sp>
+        <p:nvSpPr>
+          <p:cNvPr id="45" name="Rectangle 44"/>
+          <p:cNvSpPr/>
+          <p:nvPr/>
+        </p:nvSpPr>
+        <p:spPr>
+          <a:xfrm>
+            <a:off x="0" y="6583680"/>
+            <a:ext cx="12191695" cy="274320"/>
+          </a:xfrm>
+          <a:prstGeom prst="rect">
+            <a:avLst/>
+          </a:prstGeom>
+          <a:solidFill>
+            <a:srgbClr val="F2F5F9"/>
+          </a:solidFill>
+          <a:ln>
+            <a:noFill/>
+          </a:ln>
+        </p:spPr>
+        <p:style>
+          <a:lnRef idx="1">
+            <a:schemeClr val="accent1"/>
+          </a:lnRef>
+          <a:fillRef idx="3">
+            <a:schemeClr val="accent1"/>
+          </a:fillRef>
+          <a:effectRef idx="2">
+            <a:schemeClr val="accent1"/>
+          </a:effectRef>
+          <a:fontRef idx="minor">
+            <a:schemeClr val="lt1"/>
+          </a:fontRef>
+        </p:style>
+        <p:txBody>
+          <a:bodyPr rtlCol="0" anchor="ctr"/>
+          <a:lstStyle/>
+          <a:p>
+            <a:pPr algn="ctr"/>
+          </a:p>
+        </p:txBody>
+      </p:sp>
+      <p:sp>
+        <p:nvSpPr>
+          <p:cNvPr id="46" name="TextBox 45"/>
+          <p:cNvSpPr txBox="1"/>
+          <p:nvPr/>
+        </p:nvSpPr>
+        <p:spPr>
+          <a:xfrm>
+            <a:off x="457200" y="6601968"/>
+            <a:ext cx="9144000" cy="256032"/>
+          </a:xfrm>
+          <a:prstGeom prst="rect">
+            <a:avLst/>
+          </a:prstGeom>
+          <a:noFill/>
+        </p:spPr>
+        <p:txBody>
+          <a:bodyPr wrap="square" lIns="45720" rIns="45720" tIns="18288" bIns="18288">
+            <a:spAutoFit/>
+          </a:bodyPr>
+          <a:lstStyle/>
+          <a:p>
+            <a:pPr algn="l"/>
+            <a:r>
               <a:rPr sz="1000" b="0">
                 <a:solidFill>
                   <a:srgbClr val="555C66"/>
@@ -10111,7 +10557,7 @@
       </p:sp>
       <p:sp>
         <p:nvSpPr>
-          <p:cNvPr id="39" name="TextBox 38"/>
+          <p:cNvPr id="47" name="TextBox 46"/>
           <p:cNvSpPr txBox="1"/>
           <p:nvPr/>
         </p:nvSpPr>
@@ -10321,7 +10767,7 @@
                 </a:solidFill>
                 <a:latin typeface="Calibri"/>
               </a:rPr>
-              <a:t>Roadmap</a:t>
+              <a:t>Further Enhancements</a:t>
             </a:r>
           </a:p>
         </p:txBody>
@@ -10356,7 +10802,7 @@
                 </a:solidFill>
                 <a:latin typeface="Calibri"/>
               </a:rPr>
-              <a:t>From today to the vision</a:t>
+              <a:t>Ideas worth exploring next</a:t>
             </a:r>
           </a:p>
         </p:txBody>
@@ -10369,14 +10815,14 @@
         </p:nvSpPr>
         <p:spPr>
           <a:xfrm>
-            <a:off x="640080" y="1417320"/>
-            <a:ext cx="2194560" cy="868680"/>
-          </a:xfrm>
-          <a:prstGeom prst="rect">
-            <a:avLst/>
-          </a:prstGeom>
-          <a:solidFill>
-            <a:srgbClr val="2EA04F"/>
+            <a:off x="548640" y="1417320"/>
+            <a:ext cx="5623560" cy="868680"/>
+          </a:xfrm>
+          <a:prstGeom prst="rect">
+            <a:avLst/>
+          </a:prstGeom>
+          <a:solidFill>
+            <a:srgbClr val="F2F5F9"/>
           </a:solidFill>
           <a:ln>
             <a:noFill/>
@@ -10412,8 +10858,8 @@
         </p:nvSpPr>
         <p:spPr>
           <a:xfrm>
-            <a:off x="640080" y="1636776"/>
-            <a:ext cx="2194560" cy="457200"/>
+            <a:off x="731520" y="1508760"/>
+            <a:ext cx="5394960" cy="365760"/>
           </a:xfrm>
           <a:prstGeom prst="rect">
             <a:avLst/>
@@ -10426,29 +10872,64 @@
           </a:bodyPr>
           <a:lstStyle/>
           <a:p>
-            <a:pPr algn="ctr"/>
-            <a:r>
-              <a:rPr sz="1800" b="1">
-                <a:solidFill>
-                  <a:srgbClr val="FFFFFF"/>
-                </a:solidFill>
-                <a:latin typeface="Calibri"/>
-              </a:rPr>
-              <a:t>Now</a:t>
-            </a:r>
-          </a:p>
-        </p:txBody>
-      </p:sp>
-      <p:sp>
-        <p:nvSpPr>
-          <p:cNvPr id="9" name="Rectangle 8"/>
+            <a:pPr algn="l"/>
+            <a:r>
+              <a:rPr sz="1500" b="1">
+                <a:solidFill>
+                  <a:srgbClr val="1F6FB5"/>
+                </a:solidFill>
+                <a:latin typeface="Calibri"/>
+              </a:rPr>
+              <a:t>🔔  Slack / Teams alerts</a:t>
+            </a:r>
+          </a:p>
+        </p:txBody>
+      </p:sp>
+      <p:sp>
+        <p:nvSpPr>
+          <p:cNvPr id="9" name="TextBox 8"/>
+          <p:cNvSpPr txBox="1"/>
+          <p:nvPr/>
+        </p:nvSpPr>
+        <p:spPr>
+          <a:xfrm>
+            <a:off x="731520" y="1856232"/>
+            <a:ext cx="5394960" cy="365760"/>
+          </a:xfrm>
+          <a:prstGeom prst="rect">
+            <a:avLst/>
+          </a:prstGeom>
+          <a:noFill/>
+        </p:spPr>
+        <p:txBody>
+          <a:bodyPr wrap="square" lIns="45720" rIns="45720" tIns="18288" bIns="18288">
+            <a:spAutoFit/>
+          </a:bodyPr>
+          <a:lstStyle/>
+          <a:p>
+            <a:pPr algn="l"/>
+            <a:r>
+              <a:rPr sz="1300" b="0">
+                <a:solidFill>
+                  <a:srgbClr val="0B2A4A"/>
+                </a:solidFill>
+                <a:latin typeface="Calibri"/>
+              </a:rPr>
+              <a:t>Instant notification per failure with AI summary link</a:t>
+            </a:r>
+          </a:p>
+        </p:txBody>
+      </p:sp>
+      <p:sp>
+        <p:nvSpPr>
+          <p:cNvPr id="10" name="Rectangle 9"/>
           <p:cNvSpPr/>
           <p:nvPr/>
         </p:nvSpPr>
         <p:spPr>
           <a:xfrm>
-            <a:off x="2926080" y="1417320"/>
-            <a:ext cx="8595360" cy="868680"/>
+            <a:off x="6355080" y="1417320"/>
+            <a:ext cx="5623560" cy="868680"/>
           </a:xfrm>
           <a:prstGeom prst="rect">
             <a:avLst/>
@@ -10484,14 +10965,14 @@
       </p:sp>
       <p:sp>
         <p:nvSpPr>
-          <p:cNvPr id="10" name="TextBox 9"/>
+          <p:cNvPr id="11" name="TextBox 10"/>
           <p:cNvSpPr txBox="1"/>
           <p:nvPr/>
         </p:nvSpPr>
         <p:spPr>
           <a:xfrm>
-            <a:off x="3108960" y="1645920"/>
-            <a:ext cx="8321040" cy="457200"/>
+            <a:off x="6537960" y="1508760"/>
+            <a:ext cx="5394960" cy="365760"/>
           </a:xfrm>
           <a:prstGeom prst="rect">
             <a:avLst/>
@@ -10506,33 +10987,68 @@
           <a:p>
             <a:pPr algn="l"/>
             <a:r>
-              <a:rPr sz="1500" b="0">
+              <a:rPr sz="1500" b="1">
+                <a:solidFill>
+                  <a:srgbClr val="1F6FB5"/>
+                </a:solidFill>
+                <a:latin typeface="Calibri"/>
+              </a:rPr>
+              <a:t>📱  Live dashboard site</a:t>
+            </a:r>
+          </a:p>
+        </p:txBody>
+      </p:sp>
+      <p:sp>
+        <p:nvSpPr>
+          <p:cNvPr id="12" name="TextBox 11"/>
+          <p:cNvSpPr txBox="1"/>
+          <p:nvPr/>
+        </p:nvSpPr>
+        <p:spPr>
+          <a:xfrm>
+            <a:off x="6537960" y="1856232"/>
+            <a:ext cx="5394960" cy="365760"/>
+          </a:xfrm>
+          <a:prstGeom prst="rect">
+            <a:avLst/>
+          </a:prstGeom>
+          <a:noFill/>
+        </p:spPr>
+        <p:txBody>
+          <a:bodyPr wrap="square" lIns="45720" rIns="45720" tIns="18288" bIns="18288">
+            <a:spAutoFit/>
+          </a:bodyPr>
+          <a:lstStyle/>
+          <a:p>
+            <a:pPr algn="l"/>
+            <a:r>
+              <a:rPr sz="1300" b="0">
                 <a:solidFill>
                   <a:srgbClr val="0B2A4A"/>
                 </a:solidFill>
                 <a:latin typeface="Calibri"/>
               </a:rPr>
-              <a:t>Repo live · 2 jobs onboarded · weekly dashboard · Monday email</a:t>
-            </a:r>
-          </a:p>
-        </p:txBody>
-      </p:sp>
-      <p:sp>
-        <p:nvSpPr>
-          <p:cNvPr id="11" name="Rectangle 10"/>
+              <a:t>GitHub Pages site with real-time build health &amp; MTTR</a:t>
+            </a:r>
+          </a:p>
+        </p:txBody>
+      </p:sp>
+      <p:sp>
+        <p:nvSpPr>
+          <p:cNvPr id="13" name="Rectangle 12"/>
           <p:cNvSpPr/>
           <p:nvPr/>
         </p:nvSpPr>
         <p:spPr>
           <a:xfrm>
-            <a:off x="640080" y="2450592"/>
-            <a:ext cx="2194560" cy="868680"/>
-          </a:xfrm>
-          <a:prstGeom prst="rect">
-            <a:avLst/>
-          </a:prstGeom>
-          <a:solidFill>
-            <a:srgbClr val="1F6FB5"/>
+            <a:off x="548640" y="2377440"/>
+            <a:ext cx="5623560" cy="868680"/>
+          </a:xfrm>
+          <a:prstGeom prst="rect">
+            <a:avLst/>
+          </a:prstGeom>
+          <a:solidFill>
+            <a:srgbClr val="F2F5F9"/>
           </a:solidFill>
           <a:ln>
             <a:noFill/>
@@ -10562,14 +11078,14 @@
       </p:sp>
       <p:sp>
         <p:nvSpPr>
-          <p:cNvPr id="12" name="TextBox 11"/>
+          <p:cNvPr id="14" name="TextBox 13"/>
           <p:cNvSpPr txBox="1"/>
           <p:nvPr/>
         </p:nvSpPr>
         <p:spPr>
           <a:xfrm>
-            <a:off x="640080" y="2670048"/>
-            <a:ext cx="2194560" cy="457200"/>
+            <a:off x="731520" y="2468880"/>
+            <a:ext cx="5394960" cy="365760"/>
           </a:xfrm>
           <a:prstGeom prst="rect">
             <a:avLst/>
@@ -10582,29 +11098,64 @@
           </a:bodyPr>
           <a:lstStyle/>
           <a:p>
-            <a:pPr algn="ctr"/>
-            <a:r>
-              <a:rPr sz="1800" b="1">
-                <a:solidFill>
-                  <a:srgbClr val="FFFFFF"/>
-                </a:solidFill>
-                <a:latin typeface="Calibri"/>
-              </a:rPr>
-              <a:t>Next  (Q1)</a:t>
-            </a:r>
-          </a:p>
-        </p:txBody>
-      </p:sp>
-      <p:sp>
-        <p:nvSpPr>
-          <p:cNvPr id="13" name="Rectangle 12"/>
+            <a:pPr algn="l"/>
+            <a:r>
+              <a:rPr sz="1500" b="1">
+                <a:solidFill>
+                  <a:srgbClr val="1F6FB5"/>
+                </a:solidFill>
+                <a:latin typeface="Calibri"/>
+              </a:rPr>
+              <a:t>🕵️  Flaky-test detector</a:t>
+            </a:r>
+          </a:p>
+        </p:txBody>
+      </p:sp>
+      <p:sp>
+        <p:nvSpPr>
+          <p:cNvPr id="15" name="TextBox 14"/>
+          <p:cNvSpPr txBox="1"/>
+          <p:nvPr/>
+        </p:nvSpPr>
+        <p:spPr>
+          <a:xfrm>
+            <a:off x="731520" y="2816352"/>
+            <a:ext cx="5394960" cy="365760"/>
+          </a:xfrm>
+          <a:prstGeom prst="rect">
+            <a:avLst/>
+          </a:prstGeom>
+          <a:noFill/>
+        </p:spPr>
+        <p:txBody>
+          <a:bodyPr wrap="square" lIns="45720" rIns="45720" tIns="18288" bIns="18288">
+            <a:spAutoFit/>
+          </a:bodyPr>
+          <a:lstStyle/>
+          <a:p>
+            <a:pPr algn="l"/>
+            <a:r>
+              <a:rPr sz="1300" b="0">
+                <a:solidFill>
+                  <a:srgbClr val="0B2A4A"/>
+                </a:solidFill>
+                <a:latin typeface="Calibri"/>
+              </a:rPr>
+              <a:t>Score tests by instability, auto-quarantine noisy ones</a:t>
+            </a:r>
+          </a:p>
+        </p:txBody>
+      </p:sp>
+      <p:sp>
+        <p:nvSpPr>
+          <p:cNvPr id="16" name="Rectangle 15"/>
           <p:cNvSpPr/>
           <p:nvPr/>
         </p:nvSpPr>
         <p:spPr>
           <a:xfrm>
-            <a:off x="2926080" y="2450592"/>
-            <a:ext cx="8595360" cy="868680"/>
+            <a:off x="6355080" y="2377440"/>
+            <a:ext cx="5623560" cy="868680"/>
           </a:xfrm>
           <a:prstGeom prst="rect">
             <a:avLst/>
@@ -10640,14 +11191,14 @@
       </p:sp>
       <p:sp>
         <p:nvSpPr>
-          <p:cNvPr id="14" name="TextBox 13"/>
+          <p:cNvPr id="17" name="TextBox 16"/>
           <p:cNvSpPr txBox="1"/>
           <p:nvPr/>
         </p:nvSpPr>
         <p:spPr>
           <a:xfrm>
-            <a:off x="3108960" y="2679192"/>
-            <a:ext cx="8321040" cy="457200"/>
+            <a:off x="6537960" y="2468880"/>
+            <a:ext cx="5394960" cy="365760"/>
           </a:xfrm>
           <a:prstGeom prst="rect">
             <a:avLst/>
@@ -10662,33 +11213,68 @@
           <a:p>
             <a:pPr algn="l"/>
             <a:r>
-              <a:rPr sz="1500" b="0">
+              <a:rPr sz="1500" b="1">
+                <a:solidFill>
+                  <a:srgbClr val="1F6FB5"/>
+                </a:solidFill>
+                <a:latin typeface="Calibri"/>
+              </a:rPr>
+              <a:t>📊  Trend analytics</a:t>
+            </a:r>
+          </a:p>
+        </p:txBody>
+      </p:sp>
+      <p:sp>
+        <p:nvSpPr>
+          <p:cNvPr id="18" name="TextBox 17"/>
+          <p:cNvSpPr txBox="1"/>
+          <p:nvPr/>
+        </p:nvSpPr>
+        <p:spPr>
+          <a:xfrm>
+            <a:off x="6537960" y="2816352"/>
+            <a:ext cx="5394960" cy="365760"/>
+          </a:xfrm>
+          <a:prstGeom prst="rect">
+            <a:avLst/>
+          </a:prstGeom>
+          <a:noFill/>
+        </p:spPr>
+        <p:txBody>
+          <a:bodyPr wrap="square" lIns="45720" rIns="45720" tIns="18288" bIns="18288">
+            <a:spAutoFit/>
+          </a:bodyPr>
+          <a:lstStyle/>
+          <a:p>
+            <a:pPr algn="l"/>
+            <a:r>
+              <a:rPr sz="1300" b="0">
                 <a:solidFill>
                   <a:srgbClr val="0B2A4A"/>
                 </a:solidFill>
                 <a:latin typeface="Calibri"/>
               </a:rPr>
-              <a:t>Onboard remaining Jenkins jobs · Slack/Teams alerts · trend site</a:t>
-            </a:r>
-          </a:p>
-        </p:txBody>
-      </p:sp>
-      <p:sp>
-        <p:nvSpPr>
-          <p:cNvPr id="15" name="Rectangle 14"/>
+              <a:t>MTTR, escape rate, top failing components</a:t>
+            </a:r>
+          </a:p>
+        </p:txBody>
+      </p:sp>
+      <p:sp>
+        <p:nvSpPr>
+          <p:cNvPr id="19" name="Rectangle 18"/>
           <p:cNvSpPr/>
           <p:nvPr/>
         </p:nvSpPr>
         <p:spPr>
           <a:xfrm>
-            <a:off x="640080" y="3483864"/>
-            <a:ext cx="2194560" cy="868680"/>
-          </a:xfrm>
-          <a:prstGeom prst="rect">
-            <a:avLst/>
-          </a:prstGeom>
-          <a:solidFill>
-            <a:srgbClr val="F5A623"/>
+            <a:off x="548640" y="3337560"/>
+            <a:ext cx="5623560" cy="868680"/>
+          </a:xfrm>
+          <a:prstGeom prst="rect">
+            <a:avLst/>
+          </a:prstGeom>
+          <a:solidFill>
+            <a:srgbClr val="F2F5F9"/>
           </a:solidFill>
           <a:ln>
             <a:noFill/>
@@ -10718,14 +11304,14 @@
       </p:sp>
       <p:sp>
         <p:nvSpPr>
-          <p:cNvPr id="16" name="TextBox 15"/>
+          <p:cNvPr id="20" name="TextBox 19"/>
           <p:cNvSpPr txBox="1"/>
           <p:nvPr/>
         </p:nvSpPr>
         <p:spPr>
           <a:xfrm>
-            <a:off x="640080" y="3703320"/>
-            <a:ext cx="2194560" cy="457200"/>
+            <a:off x="731520" y="3429000"/>
+            <a:ext cx="5394960" cy="365760"/>
           </a:xfrm>
           <a:prstGeom prst="rect">
             <a:avLst/>
@@ -10738,29 +11324,64 @@
           </a:bodyPr>
           <a:lstStyle/>
           <a:p>
-            <a:pPr algn="ctr"/>
-            <a:r>
-              <a:rPr sz="1800" b="1">
-                <a:solidFill>
-                  <a:srgbClr val="FFFFFF"/>
-                </a:solidFill>
-                <a:latin typeface="Calibri"/>
-              </a:rPr>
-              <a:t>Then  (Q2)</a:t>
-            </a:r>
-          </a:p>
-        </p:txBody>
-      </p:sp>
-      <p:sp>
-        <p:nvSpPr>
-          <p:cNvPr id="17" name="Rectangle 16"/>
+            <a:pPr algn="l"/>
+            <a:r>
+              <a:rPr sz="1500" b="1">
+                <a:solidFill>
+                  <a:srgbClr val="1F6FB5"/>
+                </a:solidFill>
+                <a:latin typeface="Calibri"/>
+              </a:rPr>
+              <a:t>🔗  GitHub Issue integration</a:t>
+            </a:r>
+          </a:p>
+        </p:txBody>
+      </p:sp>
+      <p:sp>
+        <p:nvSpPr>
+          <p:cNvPr id="21" name="TextBox 20"/>
+          <p:cNvSpPr txBox="1"/>
+          <p:nvPr/>
+        </p:nvSpPr>
+        <p:spPr>
+          <a:xfrm>
+            <a:off x="731520" y="3776472"/>
+            <a:ext cx="5394960" cy="365760"/>
+          </a:xfrm>
+          <a:prstGeom prst="rect">
+            <a:avLst/>
+          </a:prstGeom>
+          <a:noFill/>
+        </p:spPr>
+        <p:txBody>
+          <a:bodyPr wrap="square" lIns="45720" rIns="45720" tIns="18288" bIns="18288">
+            <a:spAutoFit/>
+          </a:bodyPr>
+          <a:lstStyle/>
+          <a:p>
+            <a:pPr algn="l"/>
+            <a:r>
+              <a:rPr sz="1300" b="0">
+                <a:solidFill>
+                  <a:srgbClr val="0B2A4A"/>
+                </a:solidFill>
+                <a:latin typeface="Calibri"/>
+              </a:rPr>
+              <a:t>Auto-link investigations to related PRs &amp; commits</a:t>
+            </a:r>
+          </a:p>
+        </p:txBody>
+      </p:sp>
+      <p:sp>
+        <p:nvSpPr>
+          <p:cNvPr id="22" name="Rectangle 21"/>
           <p:cNvSpPr/>
           <p:nvPr/>
         </p:nvSpPr>
         <p:spPr>
           <a:xfrm>
-            <a:off x="2926080" y="3483864"/>
-            <a:ext cx="8595360" cy="868680"/>
+            <a:off x="6355080" y="3337560"/>
+            <a:ext cx="5623560" cy="868680"/>
           </a:xfrm>
           <a:prstGeom prst="rect">
             <a:avLst/>
@@ -10796,14 +11417,14 @@
       </p:sp>
       <p:sp>
         <p:nvSpPr>
-          <p:cNvPr id="18" name="TextBox 17"/>
+          <p:cNvPr id="23" name="TextBox 22"/>
           <p:cNvSpPr txBox="1"/>
           <p:nvPr/>
         </p:nvSpPr>
         <p:spPr>
           <a:xfrm>
-            <a:off x="3108960" y="3712464"/>
-            <a:ext cx="8321040" cy="457200"/>
+            <a:off x="6537960" y="3429000"/>
+            <a:ext cx="5394960" cy="365760"/>
           </a:xfrm>
           <a:prstGeom prst="rect">
             <a:avLst/>
@@ -10818,33 +11439,68 @@
           <a:p>
             <a:pPr algn="l"/>
             <a:r>
-              <a:rPr sz="1500" b="0">
+              <a:rPr sz="1500" b="1">
+                <a:solidFill>
+                  <a:srgbClr val="1F6FB5"/>
+                </a:solidFill>
+                <a:latin typeface="Calibri"/>
+              </a:rPr>
+              <a:t>🧪  Xray / Zephyr sync</a:t>
+            </a:r>
+          </a:p>
+        </p:txBody>
+      </p:sp>
+      <p:sp>
+        <p:nvSpPr>
+          <p:cNvPr id="24" name="TextBox 23"/>
+          <p:cNvSpPr txBox="1"/>
+          <p:nvPr/>
+        </p:nvSpPr>
+        <p:spPr>
+          <a:xfrm>
+            <a:off x="6537960" y="3776472"/>
+            <a:ext cx="5394960" cy="365760"/>
+          </a:xfrm>
+          <a:prstGeom prst="rect">
+            <a:avLst/>
+          </a:prstGeom>
+          <a:noFill/>
+        </p:spPr>
+        <p:txBody>
+          <a:bodyPr wrap="square" lIns="45720" rIns="45720" tIns="18288" bIns="18288">
+            <a:spAutoFit/>
+          </a:bodyPr>
+          <a:lstStyle/>
+          <a:p>
+            <a:pPr algn="l"/>
+            <a:r>
+              <a:rPr sz="1300" b="0">
                 <a:solidFill>
                   <a:srgbClr val="0B2A4A"/>
                 </a:solidFill>
                 <a:latin typeface="Calibri"/>
               </a:rPr>
-              <a:t>AI classifier · auto-Jira via Jira MCP · flaky-test detector</a:t>
-            </a:r>
-          </a:p>
-        </p:txBody>
-      </p:sp>
-      <p:sp>
-        <p:nvSpPr>
-          <p:cNvPr id="19" name="Rectangle 18"/>
+              <a:t>Push automation results into Jira Test Management</a:t>
+            </a:r>
+          </a:p>
+        </p:txBody>
+      </p:sp>
+      <p:sp>
+        <p:nvSpPr>
+          <p:cNvPr id="25" name="Rectangle 24"/>
           <p:cNvSpPr/>
           <p:nvPr/>
         </p:nvSpPr>
         <p:spPr>
           <a:xfrm>
-            <a:off x="640080" y="4517136"/>
-            <a:ext cx="2194560" cy="868680"/>
-          </a:xfrm>
-          <a:prstGeom prst="rect">
-            <a:avLst/>
-          </a:prstGeom>
-          <a:solidFill>
-            <a:srgbClr val="7A3FA6"/>
+            <a:off x="548640" y="4297680"/>
+            <a:ext cx="5623560" cy="868680"/>
+          </a:xfrm>
+          <a:prstGeom prst="rect">
+            <a:avLst/>
+          </a:prstGeom>
+          <a:solidFill>
+            <a:srgbClr val="F2F5F9"/>
           </a:solidFill>
           <a:ln>
             <a:noFill/>
@@ -10874,14 +11530,14 @@
       </p:sp>
       <p:sp>
         <p:nvSpPr>
-          <p:cNvPr id="20" name="TextBox 19"/>
+          <p:cNvPr id="26" name="TextBox 25"/>
           <p:cNvSpPr txBox="1"/>
           <p:nvPr/>
         </p:nvSpPr>
         <p:spPr>
           <a:xfrm>
-            <a:off x="640080" y="4736592"/>
-            <a:ext cx="2194560" cy="457200"/>
+            <a:off x="731520" y="4389120"/>
+            <a:ext cx="5394960" cy="365760"/>
           </a:xfrm>
           <a:prstGeom prst="rect">
             <a:avLst/>
@@ -10894,29 +11550,64 @@
           </a:bodyPr>
           <a:lstStyle/>
           <a:p>
-            <a:pPr algn="ctr"/>
-            <a:r>
-              <a:rPr sz="1800" b="1">
-                <a:solidFill>
-                  <a:srgbClr val="FFFFFF"/>
-                </a:solidFill>
-                <a:latin typeface="Calibri"/>
-              </a:rPr>
-              <a:t>Later (Q3)</a:t>
-            </a:r>
-          </a:p>
-        </p:txBody>
-      </p:sp>
-      <p:sp>
-        <p:nvSpPr>
-          <p:cNvPr id="21" name="Rectangle 20"/>
+            <a:pPr algn="l"/>
+            <a:r>
+              <a:rPr sz="1500" b="1">
+                <a:solidFill>
+                  <a:srgbClr val="1F6FB5"/>
+                </a:solidFill>
+                <a:latin typeface="Calibri"/>
+              </a:rPr>
+              <a:t>🧠  Historical corpus</a:t>
+            </a:r>
+          </a:p>
+        </p:txBody>
+      </p:sp>
+      <p:sp>
+        <p:nvSpPr>
+          <p:cNvPr id="27" name="TextBox 26"/>
+          <p:cNvSpPr txBox="1"/>
+          <p:nvPr/>
+        </p:nvSpPr>
+        <p:spPr>
+          <a:xfrm>
+            <a:off x="731520" y="4736592"/>
+            <a:ext cx="5394960" cy="365760"/>
+          </a:xfrm>
+          <a:prstGeom prst="rect">
+            <a:avLst/>
+          </a:prstGeom>
+          <a:noFill/>
+        </p:spPr>
+        <p:txBody>
+          <a:bodyPr wrap="square" lIns="45720" rIns="45720" tIns="18288" bIns="18288">
+            <a:spAutoFit/>
+          </a:bodyPr>
+          <a:lstStyle/>
+          <a:p>
+            <a:pPr algn="l"/>
+            <a:r>
+              <a:rPr sz="1300" b="0">
+                <a:solidFill>
+                  <a:srgbClr val="0B2A4A"/>
+                </a:solidFill>
+                <a:latin typeface="Calibri"/>
+              </a:rPr>
+              <a:t>Copilot searches past investigations before writing new</a:t>
+            </a:r>
+          </a:p>
+        </p:txBody>
+      </p:sp>
+      <p:sp>
+        <p:nvSpPr>
+          <p:cNvPr id="28" name="Rectangle 27"/>
           <p:cNvSpPr/>
           <p:nvPr/>
         </p:nvSpPr>
         <p:spPr>
           <a:xfrm>
-            <a:off x="2926080" y="4517136"/>
-            <a:ext cx="8595360" cy="868680"/>
+            <a:off x="6355080" y="4297680"/>
+            <a:ext cx="5623560" cy="868680"/>
           </a:xfrm>
           <a:prstGeom prst="rect">
             <a:avLst/>
@@ -10952,14 +11643,14 @@
       </p:sp>
       <p:sp>
         <p:nvSpPr>
-          <p:cNvPr id="22" name="TextBox 21"/>
+          <p:cNvPr id="29" name="TextBox 28"/>
           <p:cNvSpPr txBox="1"/>
           <p:nvPr/>
         </p:nvSpPr>
         <p:spPr>
           <a:xfrm>
-            <a:off x="3108960" y="4745736"/>
-            <a:ext cx="8321040" cy="457200"/>
+            <a:off x="6537960" y="4389120"/>
+            <a:ext cx="5394960" cy="365760"/>
           </a:xfrm>
           <a:prstGeom prst="rect">
             <a:avLst/>
@@ -10974,33 +11665,68 @@
           <a:p>
             <a:pPr algn="l"/>
             <a:r>
-              <a:rPr sz="1500" b="0">
+              <a:rPr sz="1500" b="1">
+                <a:solidFill>
+                  <a:srgbClr val="1F6FB5"/>
+                </a:solidFill>
+                <a:latin typeface="Calibri"/>
+              </a:rPr>
+              <a:t>🌐  Multi-team rollout</a:t>
+            </a:r>
+          </a:p>
+        </p:txBody>
+      </p:sp>
+      <p:sp>
+        <p:nvSpPr>
+          <p:cNvPr id="30" name="TextBox 29"/>
+          <p:cNvSpPr txBox="1"/>
+          <p:nvPr/>
+        </p:nvSpPr>
+        <p:spPr>
+          <a:xfrm>
+            <a:off x="6537960" y="4736592"/>
+            <a:ext cx="5394960" cy="365760"/>
+          </a:xfrm>
+          <a:prstGeom prst="rect">
+            <a:avLst/>
+          </a:prstGeom>
+          <a:noFill/>
+        </p:spPr>
+        <p:txBody>
+          <a:bodyPr wrap="square" lIns="45720" rIns="45720" tIns="18288" bIns="18288">
+            <a:spAutoFit/>
+          </a:bodyPr>
+          <a:lstStyle/>
+          <a:p>
+            <a:pPr algn="l"/>
+            <a:r>
+              <a:rPr sz="1300" b="0">
                 <a:solidFill>
                   <a:srgbClr val="0B2A4A"/>
                 </a:solidFill>
                 <a:latin typeface="Calibri"/>
               </a:rPr>
-              <a:t>Auto-fix PRs for test-side issues · self-healing suggestions</a:t>
-            </a:r>
-          </a:p>
-        </p:txBody>
-      </p:sp>
-      <p:sp>
-        <p:nvSpPr>
-          <p:cNvPr id="23" name="Rectangle 22"/>
+              <a:t>Onboard other QA teams — same repo pattern, own folder</a:t>
+            </a:r>
+          </a:p>
+        </p:txBody>
+      </p:sp>
+      <p:sp>
+        <p:nvSpPr>
+          <p:cNvPr id="31" name="Rectangle 30"/>
           <p:cNvSpPr/>
           <p:nvPr/>
         </p:nvSpPr>
         <p:spPr>
           <a:xfrm>
-            <a:off x="640080" y="5550408"/>
-            <a:ext cx="2194560" cy="868680"/>
-          </a:xfrm>
-          <a:prstGeom prst="rect">
-            <a:avLst/>
-          </a:prstGeom>
-          <a:solidFill>
-            <a:srgbClr val="0B2A4A"/>
+            <a:off x="548640" y="5257800"/>
+            <a:ext cx="5623560" cy="868680"/>
+          </a:xfrm>
+          <a:prstGeom prst="rect">
+            <a:avLst/>
+          </a:prstGeom>
+          <a:solidFill>
+            <a:srgbClr val="F2F5F9"/>
           </a:solidFill>
           <a:ln>
             <a:noFill/>
@@ -11030,14 +11756,14 @@
       </p:sp>
       <p:sp>
         <p:nvSpPr>
-          <p:cNvPr id="24" name="TextBox 23"/>
+          <p:cNvPr id="32" name="TextBox 31"/>
           <p:cNvSpPr txBox="1"/>
           <p:nvPr/>
         </p:nvSpPr>
         <p:spPr>
           <a:xfrm>
-            <a:off x="640080" y="5769864"/>
-            <a:ext cx="2194560" cy="457200"/>
+            <a:off x="731520" y="5349240"/>
+            <a:ext cx="5394960" cy="365760"/>
           </a:xfrm>
           <a:prstGeom prst="rect">
             <a:avLst/>
@@ -11050,29 +11776,64 @@
           </a:bodyPr>
           <a:lstStyle/>
           <a:p>
-            <a:pPr algn="ctr"/>
-            <a:r>
-              <a:rPr sz="1800" b="1">
-                <a:solidFill>
-                  <a:srgbClr val="FFFFFF"/>
-                </a:solidFill>
-                <a:latin typeface="Calibri"/>
-              </a:rPr>
-              <a:t>Vision</a:t>
-            </a:r>
-          </a:p>
-        </p:txBody>
-      </p:sp>
-      <p:sp>
-        <p:nvSpPr>
-          <p:cNvPr id="25" name="Rectangle 24"/>
+            <a:pPr algn="l"/>
+            <a:r>
+              <a:rPr sz="1500" b="1">
+                <a:solidFill>
+                  <a:srgbClr val="1F6FB5"/>
+                </a:solidFill>
+                <a:latin typeface="Calibri"/>
+              </a:rPr>
+              <a:t>🔒  Redaction guardrails</a:t>
+            </a:r>
+          </a:p>
+        </p:txBody>
+      </p:sp>
+      <p:sp>
+        <p:nvSpPr>
+          <p:cNvPr id="33" name="TextBox 32"/>
+          <p:cNvSpPr txBox="1"/>
+          <p:nvPr/>
+        </p:nvSpPr>
+        <p:spPr>
+          <a:xfrm>
+            <a:off x="731520" y="5696712"/>
+            <a:ext cx="5394960" cy="365760"/>
+          </a:xfrm>
+          <a:prstGeom prst="rect">
+            <a:avLst/>
+          </a:prstGeom>
+          <a:noFill/>
+        </p:spPr>
+        <p:txBody>
+          <a:bodyPr wrap="square" lIns="45720" rIns="45720" tIns="18288" bIns="18288">
+            <a:spAutoFit/>
+          </a:bodyPr>
+          <a:lstStyle/>
+          <a:p>
+            <a:pPr algn="l"/>
+            <a:r>
+              <a:rPr sz="1300" b="0">
+                <a:solidFill>
+                  <a:srgbClr val="0B2A4A"/>
+                </a:solidFill>
+                <a:latin typeface="Calibri"/>
+              </a:rPr>
+              <a:t>Automatic PII/secret scrubbing before writing reports</a:t>
+            </a:r>
+          </a:p>
+        </p:txBody>
+      </p:sp>
+      <p:sp>
+        <p:nvSpPr>
+          <p:cNvPr id="34" name="Rectangle 33"/>
           <p:cNvSpPr/>
           <p:nvPr/>
         </p:nvSpPr>
         <p:spPr>
           <a:xfrm>
-            <a:off x="2926080" y="5550408"/>
-            <a:ext cx="8595360" cy="868680"/>
+            <a:off x="6355080" y="5257800"/>
+            <a:ext cx="5623560" cy="868680"/>
           </a:xfrm>
           <a:prstGeom prst="rect">
             <a:avLst/>
@@ -11108,14 +11869,14 @@
       </p:sp>
       <p:sp>
         <p:nvSpPr>
-          <p:cNvPr id="26" name="TextBox 25"/>
+          <p:cNvPr id="35" name="TextBox 34"/>
           <p:cNvSpPr txBox="1"/>
           <p:nvPr/>
         </p:nvSpPr>
         <p:spPr>
           <a:xfrm>
-            <a:off x="3108960" y="5779008"/>
-            <a:ext cx="8321040" cy="457200"/>
+            <a:off x="6537960" y="5349240"/>
+            <a:ext cx="5394960" cy="365760"/>
           </a:xfrm>
           <a:prstGeom prst="rect">
             <a:avLst/>
@@ -11130,20 +11891,55 @@
           <a:p>
             <a:pPr algn="l"/>
             <a:r>
-              <a:rPr sz="1500" b="0">
+              <a:rPr sz="1500" b="1">
+                <a:solidFill>
+                  <a:srgbClr val="1F6FB5"/>
+                </a:solidFill>
+                <a:latin typeface="Calibri"/>
+              </a:rPr>
+              <a:t>🗣️  Conversational triage</a:t>
+            </a:r>
+          </a:p>
+        </p:txBody>
+      </p:sp>
+      <p:sp>
+        <p:nvSpPr>
+          <p:cNvPr id="36" name="TextBox 35"/>
+          <p:cNvSpPr txBox="1"/>
+          <p:nvPr/>
+        </p:nvSpPr>
+        <p:spPr>
+          <a:xfrm>
+            <a:off x="6537960" y="5696712"/>
+            <a:ext cx="5394960" cy="365760"/>
+          </a:xfrm>
+          <a:prstGeom prst="rect">
+            <a:avLst/>
+          </a:prstGeom>
+          <a:noFill/>
+        </p:spPr>
+        <p:txBody>
+          <a:bodyPr wrap="square" lIns="45720" rIns="45720" tIns="18288" bIns="18288">
+            <a:spAutoFit/>
+          </a:bodyPr>
+          <a:lstStyle/>
+          <a:p>
+            <a:pPr algn="l"/>
+            <a:r>
+              <a:rPr sz="1300" b="0">
                 <a:solidFill>
                   <a:srgbClr val="0B2A4A"/>
                 </a:solidFill>
                 <a:latin typeface="Calibri"/>
               </a:rPr>
-              <a:t>Predictive analytics · MTTR SLAs · conversational triage</a:t>
-            </a:r>
-          </a:p>
-        </p:txBody>
-      </p:sp>
-      <p:sp>
-        <p:nvSpPr>
-          <p:cNvPr id="27" name="Rectangle 26"/>
+              <a:t>'Why is build 401 failing?' → chat answer</a:t>
+            </a:r>
+          </a:p>
+        </p:txBody>
+      </p:sp>
+      <p:sp>
+        <p:nvSpPr>
+          <p:cNvPr id="37" name="Rectangle 36"/>
           <p:cNvSpPr/>
           <p:nvPr/>
         </p:nvSpPr>
@@ -11186,7 +11982,7 @@
       </p:sp>
       <p:sp>
         <p:nvSpPr>
-          <p:cNvPr id="28" name="TextBox 27"/>
+          <p:cNvPr id="38" name="TextBox 37"/>
           <p:cNvSpPr txBox="1"/>
           <p:nvPr/>
         </p:nvSpPr>
@@ -11221,7 +12017,7 @@
       </p:sp>
       <p:sp>
         <p:nvSpPr>
-          <p:cNvPr id="29" name="TextBox 28"/>
+          <p:cNvPr id="39" name="TextBox 38"/>
           <p:cNvSpPr txBox="1"/>
           <p:nvPr/>
         </p:nvSpPr>
@@ -11324,6 +12120,1116 @@
         <p:spPr>
           <a:xfrm>
             <a:off x="0" y="0"/>
+            <a:ext cx="12191695" cy="1005840"/>
+          </a:xfrm>
+          <a:prstGeom prst="rect">
+            <a:avLst/>
+          </a:prstGeom>
+          <a:solidFill>
+            <a:srgbClr val="0B2A4A"/>
+          </a:solidFill>
+          <a:ln>
+            <a:noFill/>
+          </a:ln>
+        </p:spPr>
+        <p:style>
+          <a:lnRef idx="1">
+            <a:schemeClr val="accent1"/>
+          </a:lnRef>
+          <a:fillRef idx="3">
+            <a:schemeClr val="accent1"/>
+          </a:fillRef>
+          <a:effectRef idx="2">
+            <a:schemeClr val="accent1"/>
+          </a:effectRef>
+          <a:fontRef idx="minor">
+            <a:schemeClr val="lt1"/>
+          </a:fontRef>
+        </p:style>
+        <p:txBody>
+          <a:bodyPr rtlCol="0" anchor="ctr"/>
+          <a:lstStyle/>
+          <a:p>
+            <a:pPr algn="ctr"/>
+          </a:p>
+        </p:txBody>
+      </p:sp>
+      <p:sp>
+        <p:nvSpPr>
+          <p:cNvPr id="4" name="Rectangle 3"/>
+          <p:cNvSpPr/>
+          <p:nvPr/>
+        </p:nvSpPr>
+        <p:spPr>
+          <a:xfrm>
+            <a:off x="0" y="1005840"/>
+            <a:ext cx="12191695" cy="73152"/>
+          </a:xfrm>
+          <a:prstGeom prst="rect">
+            <a:avLst/>
+          </a:prstGeom>
+          <a:solidFill>
+            <a:srgbClr val="F5A623"/>
+          </a:solidFill>
+          <a:ln>
+            <a:noFill/>
+          </a:ln>
+        </p:spPr>
+        <p:style>
+          <a:lnRef idx="1">
+            <a:schemeClr val="accent1"/>
+          </a:lnRef>
+          <a:fillRef idx="3">
+            <a:schemeClr val="accent1"/>
+          </a:fillRef>
+          <a:effectRef idx="2">
+            <a:schemeClr val="accent1"/>
+          </a:effectRef>
+          <a:fontRef idx="minor">
+            <a:schemeClr val="lt1"/>
+          </a:fontRef>
+        </p:style>
+        <p:txBody>
+          <a:bodyPr rtlCol="0" anchor="ctr"/>
+          <a:lstStyle/>
+          <a:p>
+            <a:pPr algn="ctr"/>
+          </a:p>
+        </p:txBody>
+      </p:sp>
+      <p:sp>
+        <p:nvSpPr>
+          <p:cNvPr id="5" name="TextBox 4"/>
+          <p:cNvSpPr txBox="1"/>
+          <p:nvPr/>
+        </p:nvSpPr>
+        <p:spPr>
+          <a:xfrm>
+            <a:off x="457200" y="164592"/>
+            <a:ext cx="10972800" cy="548640"/>
+          </a:xfrm>
+          <a:prstGeom prst="rect">
+            <a:avLst/>
+          </a:prstGeom>
+          <a:noFill/>
+        </p:spPr>
+        <p:txBody>
+          <a:bodyPr wrap="square" lIns="45720" rIns="45720" tIns="18288" bIns="18288">
+            <a:spAutoFit/>
+          </a:bodyPr>
+          <a:lstStyle/>
+          <a:p>
+            <a:pPr algn="l"/>
+            <a:r>
+              <a:rPr sz="3000" b="1">
+                <a:solidFill>
+                  <a:srgbClr val="FFFFFF"/>
+                </a:solidFill>
+                <a:latin typeface="Calibri"/>
+              </a:rPr>
+              <a:t>Roadmap</a:t>
+            </a:r>
+          </a:p>
+        </p:txBody>
+      </p:sp>
+      <p:sp>
+        <p:nvSpPr>
+          <p:cNvPr id="6" name="TextBox 5"/>
+          <p:cNvSpPr txBox="1"/>
+          <p:nvPr/>
+        </p:nvSpPr>
+        <p:spPr>
+          <a:xfrm>
+            <a:off x="457200" y="658368"/>
+            <a:ext cx="10972800" cy="320040"/>
+          </a:xfrm>
+          <a:prstGeom prst="rect">
+            <a:avLst/>
+          </a:prstGeom>
+          <a:noFill/>
+        </p:spPr>
+        <p:txBody>
+          <a:bodyPr wrap="square" lIns="45720" rIns="45720" tIns="18288" bIns="18288">
+            <a:spAutoFit/>
+          </a:bodyPr>
+          <a:lstStyle/>
+          <a:p>
+            <a:pPr algn="l"/>
+            <a:r>
+              <a:rPr sz="1400" b="0">
+                <a:solidFill>
+                  <a:srgbClr val="CFDAE8"/>
+                </a:solidFill>
+                <a:latin typeface="Calibri"/>
+              </a:rPr>
+              <a:t>From today to the vision</a:t>
+            </a:r>
+          </a:p>
+        </p:txBody>
+      </p:sp>
+      <p:sp>
+        <p:nvSpPr>
+          <p:cNvPr id="7" name="Rectangle 6"/>
+          <p:cNvSpPr/>
+          <p:nvPr/>
+        </p:nvSpPr>
+        <p:spPr>
+          <a:xfrm>
+            <a:off x="640080" y="1417320"/>
+            <a:ext cx="2194560" cy="868680"/>
+          </a:xfrm>
+          <a:prstGeom prst="rect">
+            <a:avLst/>
+          </a:prstGeom>
+          <a:solidFill>
+            <a:srgbClr val="2EA04F"/>
+          </a:solidFill>
+          <a:ln>
+            <a:noFill/>
+          </a:ln>
+        </p:spPr>
+        <p:style>
+          <a:lnRef idx="1">
+            <a:schemeClr val="accent1"/>
+          </a:lnRef>
+          <a:fillRef idx="3">
+            <a:schemeClr val="accent1"/>
+          </a:fillRef>
+          <a:effectRef idx="2">
+            <a:schemeClr val="accent1"/>
+          </a:effectRef>
+          <a:fontRef idx="minor">
+            <a:schemeClr val="lt1"/>
+          </a:fontRef>
+        </p:style>
+        <p:txBody>
+          <a:bodyPr rtlCol="0" anchor="ctr"/>
+          <a:lstStyle/>
+          <a:p>
+            <a:pPr algn="ctr"/>
+          </a:p>
+        </p:txBody>
+      </p:sp>
+      <p:sp>
+        <p:nvSpPr>
+          <p:cNvPr id="8" name="TextBox 7"/>
+          <p:cNvSpPr txBox="1"/>
+          <p:nvPr/>
+        </p:nvSpPr>
+        <p:spPr>
+          <a:xfrm>
+            <a:off x="640080" y="1636776"/>
+            <a:ext cx="2194560" cy="457200"/>
+          </a:xfrm>
+          <a:prstGeom prst="rect">
+            <a:avLst/>
+          </a:prstGeom>
+          <a:noFill/>
+        </p:spPr>
+        <p:txBody>
+          <a:bodyPr wrap="square" lIns="45720" rIns="45720" tIns="18288" bIns="18288">
+            <a:spAutoFit/>
+          </a:bodyPr>
+          <a:lstStyle/>
+          <a:p>
+            <a:pPr algn="ctr"/>
+            <a:r>
+              <a:rPr sz="1800" b="1">
+                <a:solidFill>
+                  <a:srgbClr val="FFFFFF"/>
+                </a:solidFill>
+                <a:latin typeface="Calibri"/>
+              </a:rPr>
+              <a:t>Now</a:t>
+            </a:r>
+          </a:p>
+        </p:txBody>
+      </p:sp>
+      <p:sp>
+        <p:nvSpPr>
+          <p:cNvPr id="9" name="Rectangle 8"/>
+          <p:cNvSpPr/>
+          <p:nvPr/>
+        </p:nvSpPr>
+        <p:spPr>
+          <a:xfrm>
+            <a:off x="2926080" y="1417320"/>
+            <a:ext cx="8595360" cy="868680"/>
+          </a:xfrm>
+          <a:prstGeom prst="rect">
+            <a:avLst/>
+          </a:prstGeom>
+          <a:solidFill>
+            <a:srgbClr val="F2F5F9"/>
+          </a:solidFill>
+          <a:ln>
+            <a:noFill/>
+          </a:ln>
+        </p:spPr>
+        <p:style>
+          <a:lnRef idx="1">
+            <a:schemeClr val="accent1"/>
+          </a:lnRef>
+          <a:fillRef idx="3">
+            <a:schemeClr val="accent1"/>
+          </a:fillRef>
+          <a:effectRef idx="2">
+            <a:schemeClr val="accent1"/>
+          </a:effectRef>
+          <a:fontRef idx="minor">
+            <a:schemeClr val="lt1"/>
+          </a:fontRef>
+        </p:style>
+        <p:txBody>
+          <a:bodyPr rtlCol="0" anchor="ctr"/>
+          <a:lstStyle/>
+          <a:p>
+            <a:pPr algn="ctr"/>
+          </a:p>
+        </p:txBody>
+      </p:sp>
+      <p:sp>
+        <p:nvSpPr>
+          <p:cNvPr id="10" name="TextBox 9"/>
+          <p:cNvSpPr txBox="1"/>
+          <p:nvPr/>
+        </p:nvSpPr>
+        <p:spPr>
+          <a:xfrm>
+            <a:off x="3108960" y="1645920"/>
+            <a:ext cx="8321040" cy="457200"/>
+          </a:xfrm>
+          <a:prstGeom prst="rect">
+            <a:avLst/>
+          </a:prstGeom>
+          <a:noFill/>
+        </p:spPr>
+        <p:txBody>
+          <a:bodyPr wrap="square" lIns="45720" rIns="45720" tIns="18288" bIns="18288">
+            <a:spAutoFit/>
+          </a:bodyPr>
+          <a:lstStyle/>
+          <a:p>
+            <a:pPr algn="l"/>
+            <a:r>
+              <a:rPr sz="1500" b="0">
+                <a:solidFill>
+                  <a:srgbClr val="0B2A4A"/>
+                </a:solidFill>
+                <a:latin typeface="Calibri"/>
+              </a:rPr>
+              <a:t>Repo live · 2 jobs onboarded · weekly dashboard · Monday email</a:t>
+            </a:r>
+          </a:p>
+        </p:txBody>
+      </p:sp>
+      <p:sp>
+        <p:nvSpPr>
+          <p:cNvPr id="11" name="Rectangle 10"/>
+          <p:cNvSpPr/>
+          <p:nvPr/>
+        </p:nvSpPr>
+        <p:spPr>
+          <a:xfrm>
+            <a:off x="640080" y="2450592"/>
+            <a:ext cx="2194560" cy="868680"/>
+          </a:xfrm>
+          <a:prstGeom prst="rect">
+            <a:avLst/>
+          </a:prstGeom>
+          <a:solidFill>
+            <a:srgbClr val="1F6FB5"/>
+          </a:solidFill>
+          <a:ln>
+            <a:noFill/>
+          </a:ln>
+        </p:spPr>
+        <p:style>
+          <a:lnRef idx="1">
+            <a:schemeClr val="accent1"/>
+          </a:lnRef>
+          <a:fillRef idx="3">
+            <a:schemeClr val="accent1"/>
+          </a:fillRef>
+          <a:effectRef idx="2">
+            <a:schemeClr val="accent1"/>
+          </a:effectRef>
+          <a:fontRef idx="minor">
+            <a:schemeClr val="lt1"/>
+          </a:fontRef>
+        </p:style>
+        <p:txBody>
+          <a:bodyPr rtlCol="0" anchor="ctr"/>
+          <a:lstStyle/>
+          <a:p>
+            <a:pPr algn="ctr"/>
+          </a:p>
+        </p:txBody>
+      </p:sp>
+      <p:sp>
+        <p:nvSpPr>
+          <p:cNvPr id="12" name="TextBox 11"/>
+          <p:cNvSpPr txBox="1"/>
+          <p:nvPr/>
+        </p:nvSpPr>
+        <p:spPr>
+          <a:xfrm>
+            <a:off x="640080" y="2670048"/>
+            <a:ext cx="2194560" cy="457200"/>
+          </a:xfrm>
+          <a:prstGeom prst="rect">
+            <a:avLst/>
+          </a:prstGeom>
+          <a:noFill/>
+        </p:spPr>
+        <p:txBody>
+          <a:bodyPr wrap="square" lIns="45720" rIns="45720" tIns="18288" bIns="18288">
+            <a:spAutoFit/>
+          </a:bodyPr>
+          <a:lstStyle/>
+          <a:p>
+            <a:pPr algn="ctr"/>
+            <a:r>
+              <a:rPr sz="1800" b="1">
+                <a:solidFill>
+                  <a:srgbClr val="FFFFFF"/>
+                </a:solidFill>
+                <a:latin typeface="Calibri"/>
+              </a:rPr>
+              <a:t>Next  (Q1)</a:t>
+            </a:r>
+          </a:p>
+        </p:txBody>
+      </p:sp>
+      <p:sp>
+        <p:nvSpPr>
+          <p:cNvPr id="13" name="Rectangle 12"/>
+          <p:cNvSpPr/>
+          <p:nvPr/>
+        </p:nvSpPr>
+        <p:spPr>
+          <a:xfrm>
+            <a:off x="2926080" y="2450592"/>
+            <a:ext cx="8595360" cy="868680"/>
+          </a:xfrm>
+          <a:prstGeom prst="rect">
+            <a:avLst/>
+          </a:prstGeom>
+          <a:solidFill>
+            <a:srgbClr val="F2F5F9"/>
+          </a:solidFill>
+          <a:ln>
+            <a:noFill/>
+          </a:ln>
+        </p:spPr>
+        <p:style>
+          <a:lnRef idx="1">
+            <a:schemeClr val="accent1"/>
+          </a:lnRef>
+          <a:fillRef idx="3">
+            <a:schemeClr val="accent1"/>
+          </a:fillRef>
+          <a:effectRef idx="2">
+            <a:schemeClr val="accent1"/>
+          </a:effectRef>
+          <a:fontRef idx="minor">
+            <a:schemeClr val="lt1"/>
+          </a:fontRef>
+        </p:style>
+        <p:txBody>
+          <a:bodyPr rtlCol="0" anchor="ctr"/>
+          <a:lstStyle/>
+          <a:p>
+            <a:pPr algn="ctr"/>
+          </a:p>
+        </p:txBody>
+      </p:sp>
+      <p:sp>
+        <p:nvSpPr>
+          <p:cNvPr id="14" name="TextBox 13"/>
+          <p:cNvSpPr txBox="1"/>
+          <p:nvPr/>
+        </p:nvSpPr>
+        <p:spPr>
+          <a:xfrm>
+            <a:off x="3108960" y="2679192"/>
+            <a:ext cx="8321040" cy="457200"/>
+          </a:xfrm>
+          <a:prstGeom prst="rect">
+            <a:avLst/>
+          </a:prstGeom>
+          <a:noFill/>
+        </p:spPr>
+        <p:txBody>
+          <a:bodyPr wrap="square" lIns="45720" rIns="45720" tIns="18288" bIns="18288">
+            <a:spAutoFit/>
+          </a:bodyPr>
+          <a:lstStyle/>
+          <a:p>
+            <a:pPr algn="l"/>
+            <a:r>
+              <a:rPr sz="1500" b="0">
+                <a:solidFill>
+                  <a:srgbClr val="0B2A4A"/>
+                </a:solidFill>
+                <a:latin typeface="Calibri"/>
+              </a:rPr>
+              <a:t>Onboard remaining Jenkins jobs · Slack/Teams alerts · trend site</a:t>
+            </a:r>
+          </a:p>
+        </p:txBody>
+      </p:sp>
+      <p:sp>
+        <p:nvSpPr>
+          <p:cNvPr id="15" name="Rectangle 14"/>
+          <p:cNvSpPr/>
+          <p:nvPr/>
+        </p:nvSpPr>
+        <p:spPr>
+          <a:xfrm>
+            <a:off x="640080" y="3483864"/>
+            <a:ext cx="2194560" cy="868680"/>
+          </a:xfrm>
+          <a:prstGeom prst="rect">
+            <a:avLst/>
+          </a:prstGeom>
+          <a:solidFill>
+            <a:srgbClr val="0F8B8D"/>
+          </a:solidFill>
+          <a:ln>
+            <a:noFill/>
+          </a:ln>
+        </p:spPr>
+        <p:style>
+          <a:lnRef idx="1">
+            <a:schemeClr val="accent1"/>
+          </a:lnRef>
+          <a:fillRef idx="3">
+            <a:schemeClr val="accent1"/>
+          </a:fillRef>
+          <a:effectRef idx="2">
+            <a:schemeClr val="accent1"/>
+          </a:effectRef>
+          <a:fontRef idx="minor">
+            <a:schemeClr val="lt1"/>
+          </a:fontRef>
+        </p:style>
+        <p:txBody>
+          <a:bodyPr rtlCol="0" anchor="ctr"/>
+          <a:lstStyle/>
+          <a:p>
+            <a:pPr algn="ctr"/>
+          </a:p>
+        </p:txBody>
+      </p:sp>
+      <p:sp>
+        <p:nvSpPr>
+          <p:cNvPr id="16" name="TextBox 15"/>
+          <p:cNvSpPr txBox="1"/>
+          <p:nvPr/>
+        </p:nvSpPr>
+        <p:spPr>
+          <a:xfrm>
+            <a:off x="640080" y="3703320"/>
+            <a:ext cx="2194560" cy="457200"/>
+          </a:xfrm>
+          <a:prstGeom prst="rect">
+            <a:avLst/>
+          </a:prstGeom>
+          <a:noFill/>
+        </p:spPr>
+        <p:txBody>
+          <a:bodyPr wrap="square" lIns="45720" rIns="45720" tIns="18288" bIns="18288">
+            <a:spAutoFit/>
+          </a:bodyPr>
+          <a:lstStyle/>
+          <a:p>
+            <a:pPr algn="ctr"/>
+            <a:r>
+              <a:rPr sz="1800" b="1">
+                <a:solidFill>
+                  <a:srgbClr val="FFFFFF"/>
+                </a:solidFill>
+                <a:latin typeface="Calibri"/>
+              </a:rPr>
+              <a:t>Then  (Q2)</a:t>
+            </a:r>
+          </a:p>
+        </p:txBody>
+      </p:sp>
+      <p:sp>
+        <p:nvSpPr>
+          <p:cNvPr id="17" name="Rectangle 16"/>
+          <p:cNvSpPr/>
+          <p:nvPr/>
+        </p:nvSpPr>
+        <p:spPr>
+          <a:xfrm>
+            <a:off x="2926080" y="3483864"/>
+            <a:ext cx="8595360" cy="868680"/>
+          </a:xfrm>
+          <a:prstGeom prst="rect">
+            <a:avLst/>
+          </a:prstGeom>
+          <a:solidFill>
+            <a:srgbClr val="F2F5F9"/>
+          </a:solidFill>
+          <a:ln>
+            <a:noFill/>
+          </a:ln>
+        </p:spPr>
+        <p:style>
+          <a:lnRef idx="1">
+            <a:schemeClr val="accent1"/>
+          </a:lnRef>
+          <a:fillRef idx="3">
+            <a:schemeClr val="accent1"/>
+          </a:fillRef>
+          <a:effectRef idx="2">
+            <a:schemeClr val="accent1"/>
+          </a:effectRef>
+          <a:fontRef idx="minor">
+            <a:schemeClr val="lt1"/>
+          </a:fontRef>
+        </p:style>
+        <p:txBody>
+          <a:bodyPr rtlCol="0" anchor="ctr"/>
+          <a:lstStyle/>
+          <a:p>
+            <a:pPr algn="ctr"/>
+          </a:p>
+        </p:txBody>
+      </p:sp>
+      <p:sp>
+        <p:nvSpPr>
+          <p:cNvPr id="18" name="TextBox 17"/>
+          <p:cNvSpPr txBox="1"/>
+          <p:nvPr/>
+        </p:nvSpPr>
+        <p:spPr>
+          <a:xfrm>
+            <a:off x="3108960" y="3712464"/>
+            <a:ext cx="8321040" cy="457200"/>
+          </a:xfrm>
+          <a:prstGeom prst="rect">
+            <a:avLst/>
+          </a:prstGeom>
+          <a:noFill/>
+        </p:spPr>
+        <p:txBody>
+          <a:bodyPr wrap="square" lIns="45720" rIns="45720" tIns="18288" bIns="18288">
+            <a:spAutoFit/>
+          </a:bodyPr>
+          <a:lstStyle/>
+          <a:p>
+            <a:pPr algn="l"/>
+            <a:r>
+              <a:rPr sz="1500" b="0">
+                <a:solidFill>
+                  <a:srgbClr val="0B2A4A"/>
+                </a:solidFill>
+                <a:latin typeface="Calibri"/>
+              </a:rPr>
+              <a:t>AI classifier · auto-Jira via Jira MCP · Xray / Zephyr sync</a:t>
+            </a:r>
+          </a:p>
+        </p:txBody>
+      </p:sp>
+      <p:sp>
+        <p:nvSpPr>
+          <p:cNvPr id="19" name="Rectangle 18"/>
+          <p:cNvSpPr/>
+          <p:nvPr/>
+        </p:nvSpPr>
+        <p:spPr>
+          <a:xfrm>
+            <a:off x="640080" y="4517136"/>
+            <a:ext cx="2194560" cy="868680"/>
+          </a:xfrm>
+          <a:prstGeom prst="rect">
+            <a:avLst/>
+          </a:prstGeom>
+          <a:solidFill>
+            <a:srgbClr val="7A3FA6"/>
+          </a:solidFill>
+          <a:ln>
+            <a:noFill/>
+          </a:ln>
+        </p:spPr>
+        <p:style>
+          <a:lnRef idx="1">
+            <a:schemeClr val="accent1"/>
+          </a:lnRef>
+          <a:fillRef idx="3">
+            <a:schemeClr val="accent1"/>
+          </a:fillRef>
+          <a:effectRef idx="2">
+            <a:schemeClr val="accent1"/>
+          </a:effectRef>
+          <a:fontRef idx="minor">
+            <a:schemeClr val="lt1"/>
+          </a:fontRef>
+        </p:style>
+        <p:txBody>
+          <a:bodyPr rtlCol="0" anchor="ctr"/>
+          <a:lstStyle/>
+          <a:p>
+            <a:pPr algn="ctr"/>
+          </a:p>
+        </p:txBody>
+      </p:sp>
+      <p:sp>
+        <p:nvSpPr>
+          <p:cNvPr id="20" name="TextBox 19"/>
+          <p:cNvSpPr txBox="1"/>
+          <p:nvPr/>
+        </p:nvSpPr>
+        <p:spPr>
+          <a:xfrm>
+            <a:off x="640080" y="4736592"/>
+            <a:ext cx="2194560" cy="457200"/>
+          </a:xfrm>
+          <a:prstGeom prst="rect">
+            <a:avLst/>
+          </a:prstGeom>
+          <a:noFill/>
+        </p:spPr>
+        <p:txBody>
+          <a:bodyPr wrap="square" lIns="45720" rIns="45720" tIns="18288" bIns="18288">
+            <a:spAutoFit/>
+          </a:bodyPr>
+          <a:lstStyle/>
+          <a:p>
+            <a:pPr algn="ctr"/>
+            <a:r>
+              <a:rPr sz="1800" b="1">
+                <a:solidFill>
+                  <a:srgbClr val="FFFFFF"/>
+                </a:solidFill>
+                <a:latin typeface="Calibri"/>
+              </a:rPr>
+              <a:t>Later (Q3)</a:t>
+            </a:r>
+          </a:p>
+        </p:txBody>
+      </p:sp>
+      <p:sp>
+        <p:nvSpPr>
+          <p:cNvPr id="21" name="Rectangle 20"/>
+          <p:cNvSpPr/>
+          <p:nvPr/>
+        </p:nvSpPr>
+        <p:spPr>
+          <a:xfrm>
+            <a:off x="2926080" y="4517136"/>
+            <a:ext cx="8595360" cy="868680"/>
+          </a:xfrm>
+          <a:prstGeom prst="rect">
+            <a:avLst/>
+          </a:prstGeom>
+          <a:solidFill>
+            <a:srgbClr val="F2F5F9"/>
+          </a:solidFill>
+          <a:ln>
+            <a:noFill/>
+          </a:ln>
+        </p:spPr>
+        <p:style>
+          <a:lnRef idx="1">
+            <a:schemeClr val="accent1"/>
+          </a:lnRef>
+          <a:fillRef idx="3">
+            <a:schemeClr val="accent1"/>
+          </a:fillRef>
+          <a:effectRef idx="2">
+            <a:schemeClr val="accent1"/>
+          </a:effectRef>
+          <a:fontRef idx="minor">
+            <a:schemeClr val="lt1"/>
+          </a:fontRef>
+        </p:style>
+        <p:txBody>
+          <a:bodyPr rtlCol="0" anchor="ctr"/>
+          <a:lstStyle/>
+          <a:p>
+            <a:pPr algn="ctr"/>
+          </a:p>
+        </p:txBody>
+      </p:sp>
+      <p:sp>
+        <p:nvSpPr>
+          <p:cNvPr id="22" name="TextBox 21"/>
+          <p:cNvSpPr txBox="1"/>
+          <p:nvPr/>
+        </p:nvSpPr>
+        <p:spPr>
+          <a:xfrm>
+            <a:off x="3108960" y="4745736"/>
+            <a:ext cx="8321040" cy="457200"/>
+          </a:xfrm>
+          <a:prstGeom prst="rect">
+            <a:avLst/>
+          </a:prstGeom>
+          <a:noFill/>
+        </p:spPr>
+        <p:txBody>
+          <a:bodyPr wrap="square" lIns="45720" rIns="45720" tIns="18288" bIns="18288">
+            <a:spAutoFit/>
+          </a:bodyPr>
+          <a:lstStyle/>
+          <a:p>
+            <a:pPr algn="l"/>
+            <a:r>
+              <a:rPr sz="1500" b="0">
+                <a:solidFill>
+                  <a:srgbClr val="0B2A4A"/>
+                </a:solidFill>
+                <a:latin typeface="Calibri"/>
+              </a:rPr>
+              <a:t>Auto-fix PRs for test-side issues · self-healing suggestions</a:t>
+            </a:r>
+          </a:p>
+        </p:txBody>
+      </p:sp>
+      <p:sp>
+        <p:nvSpPr>
+          <p:cNvPr id="23" name="Rectangle 22"/>
+          <p:cNvSpPr/>
+          <p:nvPr/>
+        </p:nvSpPr>
+        <p:spPr>
+          <a:xfrm>
+            <a:off x="640080" y="5550408"/>
+            <a:ext cx="2194560" cy="868680"/>
+          </a:xfrm>
+          <a:prstGeom prst="rect">
+            <a:avLst/>
+          </a:prstGeom>
+          <a:solidFill>
+            <a:srgbClr val="0B2A4A"/>
+          </a:solidFill>
+          <a:ln>
+            <a:noFill/>
+          </a:ln>
+        </p:spPr>
+        <p:style>
+          <a:lnRef idx="1">
+            <a:schemeClr val="accent1"/>
+          </a:lnRef>
+          <a:fillRef idx="3">
+            <a:schemeClr val="accent1"/>
+          </a:fillRef>
+          <a:effectRef idx="2">
+            <a:schemeClr val="accent1"/>
+          </a:effectRef>
+          <a:fontRef idx="minor">
+            <a:schemeClr val="lt1"/>
+          </a:fontRef>
+        </p:style>
+        <p:txBody>
+          <a:bodyPr rtlCol="0" anchor="ctr"/>
+          <a:lstStyle/>
+          <a:p>
+            <a:pPr algn="ctr"/>
+          </a:p>
+        </p:txBody>
+      </p:sp>
+      <p:sp>
+        <p:nvSpPr>
+          <p:cNvPr id="24" name="TextBox 23"/>
+          <p:cNvSpPr txBox="1"/>
+          <p:nvPr/>
+        </p:nvSpPr>
+        <p:spPr>
+          <a:xfrm>
+            <a:off x="640080" y="5769864"/>
+            <a:ext cx="2194560" cy="457200"/>
+          </a:xfrm>
+          <a:prstGeom prst="rect">
+            <a:avLst/>
+          </a:prstGeom>
+          <a:noFill/>
+        </p:spPr>
+        <p:txBody>
+          <a:bodyPr wrap="square" lIns="45720" rIns="45720" tIns="18288" bIns="18288">
+            <a:spAutoFit/>
+          </a:bodyPr>
+          <a:lstStyle/>
+          <a:p>
+            <a:pPr algn="ctr"/>
+            <a:r>
+              <a:rPr sz="1800" b="1">
+                <a:solidFill>
+                  <a:srgbClr val="FFFFFF"/>
+                </a:solidFill>
+                <a:latin typeface="Calibri"/>
+              </a:rPr>
+              <a:t>Vision</a:t>
+            </a:r>
+          </a:p>
+        </p:txBody>
+      </p:sp>
+      <p:sp>
+        <p:nvSpPr>
+          <p:cNvPr id="25" name="Rectangle 24"/>
+          <p:cNvSpPr/>
+          <p:nvPr/>
+        </p:nvSpPr>
+        <p:spPr>
+          <a:xfrm>
+            <a:off x="2926080" y="5550408"/>
+            <a:ext cx="8595360" cy="868680"/>
+          </a:xfrm>
+          <a:prstGeom prst="rect">
+            <a:avLst/>
+          </a:prstGeom>
+          <a:solidFill>
+            <a:srgbClr val="F2F5F9"/>
+          </a:solidFill>
+          <a:ln>
+            <a:noFill/>
+          </a:ln>
+        </p:spPr>
+        <p:style>
+          <a:lnRef idx="1">
+            <a:schemeClr val="accent1"/>
+          </a:lnRef>
+          <a:fillRef idx="3">
+            <a:schemeClr val="accent1"/>
+          </a:fillRef>
+          <a:effectRef idx="2">
+            <a:schemeClr val="accent1"/>
+          </a:effectRef>
+          <a:fontRef idx="minor">
+            <a:schemeClr val="lt1"/>
+          </a:fontRef>
+        </p:style>
+        <p:txBody>
+          <a:bodyPr rtlCol="0" anchor="ctr"/>
+          <a:lstStyle/>
+          <a:p>
+            <a:pPr algn="ctr"/>
+          </a:p>
+        </p:txBody>
+      </p:sp>
+      <p:sp>
+        <p:nvSpPr>
+          <p:cNvPr id="26" name="TextBox 25"/>
+          <p:cNvSpPr txBox="1"/>
+          <p:nvPr/>
+        </p:nvSpPr>
+        <p:spPr>
+          <a:xfrm>
+            <a:off x="3108960" y="5779008"/>
+            <a:ext cx="8321040" cy="457200"/>
+          </a:xfrm>
+          <a:prstGeom prst="rect">
+            <a:avLst/>
+          </a:prstGeom>
+          <a:noFill/>
+        </p:spPr>
+        <p:txBody>
+          <a:bodyPr wrap="square" lIns="45720" rIns="45720" tIns="18288" bIns="18288">
+            <a:spAutoFit/>
+          </a:bodyPr>
+          <a:lstStyle/>
+          <a:p>
+            <a:pPr algn="l"/>
+            <a:r>
+              <a:rPr sz="1500" b="0">
+                <a:solidFill>
+                  <a:srgbClr val="0B2A4A"/>
+                </a:solidFill>
+                <a:latin typeface="Calibri"/>
+              </a:rPr>
+              <a:t>Predictive analytics · MTTR SLAs · conversational triage</a:t>
+            </a:r>
+          </a:p>
+        </p:txBody>
+      </p:sp>
+      <p:sp>
+        <p:nvSpPr>
+          <p:cNvPr id="27" name="Rectangle 26"/>
+          <p:cNvSpPr/>
+          <p:nvPr/>
+        </p:nvSpPr>
+        <p:spPr>
+          <a:xfrm>
+            <a:off x="0" y="6583680"/>
+            <a:ext cx="12191695" cy="274320"/>
+          </a:xfrm>
+          <a:prstGeom prst="rect">
+            <a:avLst/>
+          </a:prstGeom>
+          <a:solidFill>
+            <a:srgbClr val="F2F5F9"/>
+          </a:solidFill>
+          <a:ln>
+            <a:noFill/>
+          </a:ln>
+        </p:spPr>
+        <p:style>
+          <a:lnRef idx="1">
+            <a:schemeClr val="accent1"/>
+          </a:lnRef>
+          <a:fillRef idx="3">
+            <a:schemeClr val="accent1"/>
+          </a:fillRef>
+          <a:effectRef idx="2">
+            <a:schemeClr val="accent1"/>
+          </a:effectRef>
+          <a:fontRef idx="minor">
+            <a:schemeClr val="lt1"/>
+          </a:fontRef>
+        </p:style>
+        <p:txBody>
+          <a:bodyPr rtlCol="0" anchor="ctr"/>
+          <a:lstStyle/>
+          <a:p>
+            <a:pPr algn="ctr"/>
+          </a:p>
+        </p:txBody>
+      </p:sp>
+      <p:sp>
+        <p:nvSpPr>
+          <p:cNvPr id="28" name="TextBox 27"/>
+          <p:cNvSpPr txBox="1"/>
+          <p:nvPr/>
+        </p:nvSpPr>
+        <p:spPr>
+          <a:xfrm>
+            <a:off x="457200" y="6601968"/>
+            <a:ext cx="9144000" cy="256032"/>
+          </a:xfrm>
+          <a:prstGeom prst="rect">
+            <a:avLst/>
+          </a:prstGeom>
+          <a:noFill/>
+        </p:spPr>
+        <p:txBody>
+          <a:bodyPr wrap="square" lIns="45720" rIns="45720" tIns="18288" bIns="18288">
+            <a:spAutoFit/>
+          </a:bodyPr>
+          <a:lstStyle/>
+          <a:p>
+            <a:pPr algn="l"/>
+            <a:r>
+              <a:rPr sz="1000" b="0">
+                <a:solidFill>
+                  <a:srgbClr val="555C66"/>
+                </a:solidFill>
+                <a:latin typeface="Calibri"/>
+              </a:rPr>
+              <a:t>AI-Assisted Test Automation Reporting  |  Demo for Management</a:t>
+            </a:r>
+          </a:p>
+        </p:txBody>
+      </p:sp>
+      <p:sp>
+        <p:nvSpPr>
+          <p:cNvPr id="29" name="TextBox 28"/>
+          <p:cNvSpPr txBox="1"/>
+          <p:nvPr/>
+        </p:nvSpPr>
+        <p:spPr>
+          <a:xfrm>
+            <a:off x="11247120" y="6601968"/>
+            <a:ext cx="822960" cy="256032"/>
+          </a:xfrm>
+          <a:prstGeom prst="rect">
+            <a:avLst/>
+          </a:prstGeom>
+          <a:noFill/>
+        </p:spPr>
+        <p:txBody>
+          <a:bodyPr wrap="square" lIns="45720" rIns="45720" tIns="18288" bIns="18288">
+            <a:spAutoFit/>
+          </a:bodyPr>
+          <a:lstStyle/>
+          <a:p>
+            <a:pPr algn="r"/>
+            <a:r>
+              <a:rPr sz="1000" b="0">
+                <a:solidFill>
+                  <a:srgbClr val="555C66"/>
+                </a:solidFill>
+                <a:latin typeface="Calibri"/>
+              </a:rPr>
+              <a:t>18</a:t>
+            </a:r>
+          </a:p>
+        </p:txBody>
+      </p:sp>
+    </p:spTree>
+  </p:cSld>
+  <p:clrMapOvr>
+    <a:masterClrMapping/>
+  </p:clrMapOvr>
+</p:sld>
+</file>
+
+<file path=ppt/slides/slide19.xml><?xml version="1.0" encoding="utf-8"?>
+<p:sld xmlns:a="http://schemas.openxmlformats.org/drawingml/2006/main" xmlns:p="http://schemas.openxmlformats.org/presentationml/2006/main" xmlns:r="http://schemas.openxmlformats.org/officeDocument/2006/relationships">
+  <p:cSld>
+    <p:spTree>
+      <p:nvGrpSpPr>
+        <p:cNvPr id="1" name=""/>
+        <p:cNvGrpSpPr/>
+        <p:nvPr/>
+      </p:nvGrpSpPr>
+      <p:grpSpPr/>
+      <p:sp>
+        <p:nvSpPr>
+          <p:cNvPr id="2" name="Rectangle 1"/>
+          <p:cNvSpPr/>
+          <p:nvPr/>
+        </p:nvSpPr>
+        <p:spPr>
+          <a:xfrm>
+            <a:off x="0" y="0"/>
+            <a:ext cx="12191695" cy="6858000"/>
+          </a:xfrm>
+          <a:prstGeom prst="rect">
+            <a:avLst/>
+          </a:prstGeom>
+          <a:solidFill>
+            <a:srgbClr val="FFFFFF"/>
+          </a:solidFill>
+          <a:ln>
+            <a:noFill/>
+          </a:ln>
+        </p:spPr>
+        <p:style>
+          <a:lnRef idx="1">
+            <a:schemeClr val="accent1"/>
+          </a:lnRef>
+          <a:fillRef idx="3">
+            <a:schemeClr val="accent1"/>
+          </a:fillRef>
+          <a:effectRef idx="2">
+            <a:schemeClr val="accent1"/>
+          </a:effectRef>
+          <a:fontRef idx="minor">
+            <a:schemeClr val="lt1"/>
+          </a:fontRef>
+        </p:style>
+        <p:txBody>
+          <a:bodyPr rtlCol="0" anchor="ctr"/>
+          <a:lstStyle/>
+          <a:p>
+            <a:pPr algn="ctr"/>
+          </a:p>
+        </p:txBody>
+      </p:sp>
+      <p:sp>
+        <p:nvSpPr>
+          <p:cNvPr id="3" name="Rectangle 2"/>
+          <p:cNvSpPr/>
+          <p:nvPr/>
+        </p:nvSpPr>
+        <p:spPr>
+          <a:xfrm>
+            <a:off x="0" y="0"/>
             <a:ext cx="12191695" cy="6858000"/>
           </a:xfrm>
           <a:prstGeom prst="rect">
@@ -11888,7 +13794,7 @@
                 </a:solidFill>
                 <a:latin typeface="Calibri"/>
               </a:rPr>
-              <a:t>•  Future Goals — auto-fix, auto-Jira, self-healing tests</a:t>
+              <a:t>•  Future Goals — auto-fix, auto-Jira, Jira Test Management sync</a:t>
             </a:r>
           </a:p>
           <a:p>
